--- a/Assignment_1/Deckv2.pptx
+++ b/Assignment_1/Deckv2.pptx
@@ -6,18 +6,17 @@
   </p:sldMasterIdLst>
   <p:sldIdLst>
     <p:sldId id="256" r:id="rId2"/>
-    <p:sldId id="263" r:id="rId3"/>
-    <p:sldId id="270" r:id="rId4"/>
-    <p:sldId id="269" r:id="rId5"/>
-    <p:sldId id="271" r:id="rId6"/>
-    <p:sldId id="268" r:id="rId7"/>
-    <p:sldId id="267" r:id="rId8"/>
-    <p:sldId id="262" r:id="rId9"/>
-    <p:sldId id="272" r:id="rId10"/>
-    <p:sldId id="266" r:id="rId11"/>
-    <p:sldId id="265" r:id="rId12"/>
-    <p:sldId id="261" r:id="rId13"/>
-    <p:sldId id="264" r:id="rId14"/>
+    <p:sldId id="270" r:id="rId3"/>
+    <p:sldId id="269" r:id="rId4"/>
+    <p:sldId id="271" r:id="rId5"/>
+    <p:sldId id="268" r:id="rId6"/>
+    <p:sldId id="267" r:id="rId7"/>
+    <p:sldId id="262" r:id="rId8"/>
+    <p:sldId id="272" r:id="rId9"/>
+    <p:sldId id="266" r:id="rId10"/>
+    <p:sldId id="265" r:id="rId11"/>
+    <p:sldId id="261" r:id="rId12"/>
+    <p:sldId id="264" r:id="rId13"/>
   </p:sldIdLst>
   <p:sldSz cx="12192000" cy="6858000"/>
   <p:notesSz cx="6858000" cy="9144000"/>
@@ -273,7 +272,7 @@
           <a:p>
             <a:fld id="{9FDBECDA-24E5-41CB-B5B0-0E702960A0C6}" type="datetimeFigureOut">
               <a:rPr lang="en-SG" smtClean="0"/>
-              <a:t>6/10/2025</a:t>
+              <a:t>7/10/2025</a:t>
             </a:fld>
             <a:endParaRPr lang="en-SG"/>
           </a:p>
@@ -473,7 +472,7 @@
           <a:p>
             <a:fld id="{9FDBECDA-24E5-41CB-B5B0-0E702960A0C6}" type="datetimeFigureOut">
               <a:rPr lang="en-SG" smtClean="0"/>
-              <a:t>6/10/2025</a:t>
+              <a:t>7/10/2025</a:t>
             </a:fld>
             <a:endParaRPr lang="en-SG"/>
           </a:p>
@@ -683,7 +682,7 @@
           <a:p>
             <a:fld id="{9FDBECDA-24E5-41CB-B5B0-0E702960A0C6}" type="datetimeFigureOut">
               <a:rPr lang="en-SG" smtClean="0"/>
-              <a:t>6/10/2025</a:t>
+              <a:t>7/10/2025</a:t>
             </a:fld>
             <a:endParaRPr lang="en-SG"/>
           </a:p>
@@ -883,7 +882,7 @@
           <a:p>
             <a:fld id="{9FDBECDA-24E5-41CB-B5B0-0E702960A0C6}" type="datetimeFigureOut">
               <a:rPr lang="en-SG" smtClean="0"/>
-              <a:t>6/10/2025</a:t>
+              <a:t>7/10/2025</a:t>
             </a:fld>
             <a:endParaRPr lang="en-SG"/>
           </a:p>
@@ -1159,7 +1158,7 @@
           <a:p>
             <a:fld id="{9FDBECDA-24E5-41CB-B5B0-0E702960A0C6}" type="datetimeFigureOut">
               <a:rPr lang="en-SG" smtClean="0"/>
-              <a:t>6/10/2025</a:t>
+              <a:t>7/10/2025</a:t>
             </a:fld>
             <a:endParaRPr lang="en-SG"/>
           </a:p>
@@ -1427,7 +1426,7 @@
           <a:p>
             <a:fld id="{9FDBECDA-24E5-41CB-B5B0-0E702960A0C6}" type="datetimeFigureOut">
               <a:rPr lang="en-SG" smtClean="0"/>
-              <a:t>6/10/2025</a:t>
+              <a:t>7/10/2025</a:t>
             </a:fld>
             <a:endParaRPr lang="en-SG"/>
           </a:p>
@@ -1842,7 +1841,7 @@
           <a:p>
             <a:fld id="{9FDBECDA-24E5-41CB-B5B0-0E702960A0C6}" type="datetimeFigureOut">
               <a:rPr lang="en-SG" smtClean="0"/>
-              <a:t>6/10/2025</a:t>
+              <a:t>7/10/2025</a:t>
             </a:fld>
             <a:endParaRPr lang="en-SG"/>
           </a:p>
@@ -1984,7 +1983,7 @@
           <a:p>
             <a:fld id="{9FDBECDA-24E5-41CB-B5B0-0E702960A0C6}" type="datetimeFigureOut">
               <a:rPr lang="en-SG" smtClean="0"/>
-              <a:t>6/10/2025</a:t>
+              <a:t>7/10/2025</a:t>
             </a:fld>
             <a:endParaRPr lang="en-SG"/>
           </a:p>
@@ -2097,7 +2096,7 @@
           <a:p>
             <a:fld id="{9FDBECDA-24E5-41CB-B5B0-0E702960A0C6}" type="datetimeFigureOut">
               <a:rPr lang="en-SG" smtClean="0"/>
-              <a:t>6/10/2025</a:t>
+              <a:t>7/10/2025</a:t>
             </a:fld>
             <a:endParaRPr lang="en-SG"/>
           </a:p>
@@ -2410,7 +2409,7 @@
           <a:p>
             <a:fld id="{9FDBECDA-24E5-41CB-B5B0-0E702960A0C6}" type="datetimeFigureOut">
               <a:rPr lang="en-SG" smtClean="0"/>
-              <a:t>6/10/2025</a:t>
+              <a:t>7/10/2025</a:t>
             </a:fld>
             <a:endParaRPr lang="en-SG"/>
           </a:p>
@@ -2699,7 +2698,7 @@
           <a:p>
             <a:fld id="{9FDBECDA-24E5-41CB-B5B0-0E702960A0C6}" type="datetimeFigureOut">
               <a:rPr lang="en-SG" smtClean="0"/>
-              <a:t>6/10/2025</a:t>
+              <a:t>7/10/2025</a:t>
             </a:fld>
             <a:endParaRPr lang="en-SG"/>
           </a:p>
@@ -2942,7 +2941,7 @@
           <a:p>
             <a:fld id="{9FDBECDA-24E5-41CB-B5B0-0E702960A0C6}" type="datetimeFigureOut">
               <a:rPr lang="en-SG" smtClean="0"/>
-              <a:t>6/10/2025</a:t>
+              <a:t>7/10/2025</a:t>
             </a:fld>
             <a:endParaRPr lang="en-SG"/>
           </a:p>
@@ -3575,878 +3574,6 @@
           <a:chExt cx="0" cy="0"/>
         </a:xfrm>
       </p:grpSpPr>
-      <p:sp>
-        <p:nvSpPr>
-          <p:cNvPr id="5" name="TextBox 4">
-            <a:extLst>
-              <a:ext uri="{FF2B5EF4-FFF2-40B4-BE49-F238E27FC236}">
-                <a16:creationId xmlns:a16="http://schemas.microsoft.com/office/drawing/2014/main" id="{5E134DFD-233C-F8B4-CD07-FEBA3D756A45}"/>
-              </a:ext>
-            </a:extLst>
-          </p:cNvPr>
-          <p:cNvSpPr txBox="1"/>
-          <p:nvPr/>
-        </p:nvSpPr>
-        <p:spPr>
-          <a:xfrm>
-            <a:off x="623017" y="999837"/>
-            <a:ext cx="9422683" cy="5170646"/>
-          </a:xfrm>
-          <a:prstGeom prst="rect">
-            <a:avLst/>
-          </a:prstGeom>
-          <a:noFill/>
-        </p:spPr>
-        <p:txBody>
-          <a:bodyPr wrap="square" rtlCol="0">
-            <a:spAutoFit/>
-          </a:bodyPr>
-          <a:lstStyle/>
-          <a:p>
-            <a:r>
-              <a:rPr lang="en-SG" sz="2400" b="1" u="sng" dirty="0">
-                <a:latin typeface="Open Sans" panose="020B0606030504020204" pitchFamily="34" charset="0"/>
-                <a:ea typeface="Open Sans" panose="020B0606030504020204" pitchFamily="34" charset="0"/>
-                <a:cs typeface="Open Sans" panose="020B0606030504020204" pitchFamily="34" charset="0"/>
-              </a:rPr>
-              <a:t>Encoding Decisioning</a:t>
-            </a:r>
-            <a:endParaRPr lang="en-SG" b="1" u="sng" dirty="0">
-              <a:latin typeface="Open Sans" panose="020B0606030504020204" pitchFamily="34" charset="0"/>
-              <a:ea typeface="Open Sans" panose="020B0606030504020204" pitchFamily="34" charset="0"/>
-              <a:cs typeface="Open Sans" panose="020B0606030504020204" pitchFamily="34" charset="0"/>
-            </a:endParaRPr>
-          </a:p>
-          <a:p>
-            <a:endParaRPr lang="en-SG" dirty="0">
-              <a:latin typeface="Open Sans" panose="020B0606030504020204" pitchFamily="34" charset="0"/>
-              <a:ea typeface="Open Sans" panose="020B0606030504020204" pitchFamily="34" charset="0"/>
-              <a:cs typeface="Open Sans" panose="020B0606030504020204" pitchFamily="34" charset="0"/>
-            </a:endParaRPr>
-          </a:p>
-          <a:p>
-            <a:r>
-              <a:rPr lang="en-SG" dirty="0">
-                <a:latin typeface="Open Sans" panose="020B0606030504020204" pitchFamily="34" charset="0"/>
-                <a:ea typeface="Open Sans" panose="020B0606030504020204" pitchFamily="34" charset="0"/>
-                <a:cs typeface="Open Sans" panose="020B0606030504020204" pitchFamily="34" charset="0"/>
-              </a:rPr>
-              <a:t>Create and maintain a </a:t>
-            </a:r>
-            <a:r>
-              <a:rPr lang="en-SG" b="1" dirty="0">
-                <a:latin typeface="Open Sans" panose="020B0606030504020204" pitchFamily="34" charset="0"/>
-                <a:ea typeface="Open Sans" panose="020B0606030504020204" pitchFamily="34" charset="0"/>
-                <a:cs typeface="Open Sans" panose="020B0606030504020204" pitchFamily="34" charset="0"/>
-              </a:rPr>
-              <a:t>gold_config.yaml</a:t>
-            </a:r>
-            <a:r>
-              <a:rPr lang="en-SG" dirty="0">
-                <a:latin typeface="Open Sans" panose="020B0606030504020204" pitchFamily="34" charset="0"/>
-                <a:ea typeface="Open Sans" panose="020B0606030504020204" pitchFamily="34" charset="0"/>
-                <a:cs typeface="Open Sans" panose="020B0606030504020204" pitchFamily="34" charset="0"/>
-              </a:rPr>
-              <a:t> file for features which are expected to contain only </a:t>
-            </a:r>
-            <a:r>
-              <a:rPr lang="en-SG" b="1" dirty="0">
-                <a:latin typeface="Open Sans" panose="020B0606030504020204" pitchFamily="34" charset="0"/>
-                <a:ea typeface="Open Sans" panose="020B0606030504020204" pitchFamily="34" charset="0"/>
-                <a:cs typeface="Open Sans" panose="020B0606030504020204" pitchFamily="34" charset="0"/>
-              </a:rPr>
-              <a:t>business approved values</a:t>
-            </a:r>
-          </a:p>
-          <a:p>
-            <a:endParaRPr lang="en-SG" b="1" dirty="0">
-              <a:latin typeface="Open Sans" panose="020B0606030504020204" pitchFamily="34" charset="0"/>
-              <a:ea typeface="Open Sans" panose="020B0606030504020204" pitchFamily="34" charset="0"/>
-              <a:cs typeface="Open Sans" panose="020B0606030504020204" pitchFamily="34" charset="0"/>
-            </a:endParaRPr>
-          </a:p>
-          <a:p>
-            <a:pPr marL="285750" indent="-285750">
-              <a:buFont typeface="Arial" panose="020B0604020202020204" pitchFamily="34" charset="0"/>
-              <a:buChar char="•"/>
-            </a:pPr>
-            <a:r>
-              <a:rPr lang="en-SG" dirty="0">
-                <a:latin typeface="Open Sans" panose="020B0606030504020204" pitchFamily="34" charset="0"/>
-                <a:ea typeface="Open Sans" panose="020B0606030504020204" pitchFamily="34" charset="0"/>
-                <a:cs typeface="Open Sans" panose="020B0606030504020204" pitchFamily="34" charset="0"/>
-              </a:rPr>
-              <a:t>Processing pipeline verifies that columns like “Types_of_Loan” contain only approved list of values</a:t>
-            </a:r>
-          </a:p>
-          <a:p>
-            <a:pPr marL="742950" lvl="1" indent="-285750">
-              <a:buFont typeface="Wingdings" panose="05000000000000000000" pitchFamily="2" charset="2"/>
-              <a:buChar char="Ø"/>
-            </a:pPr>
-            <a:r>
-              <a:rPr lang="en-SG" dirty="0">
-                <a:latin typeface="Open Sans" panose="020B0606030504020204" pitchFamily="34" charset="0"/>
-                <a:ea typeface="Open Sans" panose="020B0606030504020204" pitchFamily="34" charset="0"/>
-                <a:cs typeface="Open Sans" panose="020B0606030504020204" pitchFamily="34" charset="0"/>
-              </a:rPr>
-              <a:t>Adopt </a:t>
-            </a:r>
-            <a:r>
-              <a:rPr lang="en-SG" b="1" dirty="0">
-                <a:latin typeface="Open Sans" panose="020B0606030504020204" pitchFamily="34" charset="0"/>
-                <a:ea typeface="Open Sans" panose="020B0606030504020204" pitchFamily="34" charset="0"/>
-                <a:cs typeface="Open Sans" panose="020B0606030504020204" pitchFamily="34" charset="0"/>
-              </a:rPr>
-              <a:t>lenient policy –</a:t>
-            </a:r>
-            <a:r>
-              <a:rPr lang="en-SG" dirty="0">
-                <a:latin typeface="Open Sans" panose="020B0606030504020204" pitchFamily="34" charset="0"/>
-                <a:ea typeface="Open Sans" panose="020B0606030504020204" pitchFamily="34" charset="0"/>
-                <a:cs typeface="Open Sans" panose="020B0606030504020204" pitchFamily="34" charset="0"/>
-              </a:rPr>
-              <a:t> log warning and ignore unapproved values</a:t>
-            </a:r>
-          </a:p>
-          <a:p>
-            <a:pPr marL="742950" lvl="1" indent="-285750">
-              <a:buFont typeface="Wingdings" panose="05000000000000000000" pitchFamily="2" charset="2"/>
-              <a:buChar char="Ø"/>
-            </a:pPr>
-            <a:r>
-              <a:rPr lang="en-SG" dirty="0">
-                <a:latin typeface="Open Sans" panose="020B0606030504020204" pitchFamily="34" charset="0"/>
-                <a:ea typeface="Open Sans" panose="020B0606030504020204" pitchFamily="34" charset="0"/>
-                <a:cs typeface="Open Sans" panose="020B0606030504020204" pitchFamily="34" charset="0"/>
-              </a:rPr>
-              <a:t>Ensures </a:t>
-            </a:r>
-            <a:r>
-              <a:rPr lang="en-SG" b="1" dirty="0">
-                <a:latin typeface="Open Sans" panose="020B0606030504020204" pitchFamily="34" charset="0"/>
-                <a:ea typeface="Open Sans" panose="020B0606030504020204" pitchFamily="34" charset="0"/>
-                <a:cs typeface="Open Sans" panose="020B0606030504020204" pitchFamily="34" charset="0"/>
-              </a:rPr>
-              <a:t>stability of gold table schema</a:t>
-            </a:r>
-            <a:r>
-              <a:rPr lang="en-SG" dirty="0">
-                <a:latin typeface="Open Sans" panose="020B0606030504020204" pitchFamily="34" charset="0"/>
-                <a:ea typeface="Open Sans" panose="020B0606030504020204" pitchFamily="34" charset="0"/>
-                <a:cs typeface="Open Sans" panose="020B0606030504020204" pitchFamily="34" charset="0"/>
-              </a:rPr>
-              <a:t> (after multi-hot-encoding)</a:t>
-            </a:r>
-          </a:p>
-          <a:p>
-            <a:pPr marL="742950" lvl="1" indent="-285750">
-              <a:buFont typeface="Wingdings" panose="05000000000000000000" pitchFamily="2" charset="2"/>
-              <a:buChar char="Ø"/>
-            </a:pPr>
-            <a:r>
-              <a:rPr lang="en-SG" b="1" dirty="0">
-                <a:latin typeface="Open Sans" panose="020B0606030504020204" pitchFamily="34" charset="0"/>
-                <a:ea typeface="Open Sans" panose="020B0606030504020204" pitchFamily="34" charset="0"/>
-                <a:cs typeface="Open Sans" panose="020B0606030504020204" pitchFamily="34" charset="0"/>
-              </a:rPr>
-              <a:t>Early detection </a:t>
-            </a:r>
-            <a:r>
-              <a:rPr lang="en-SG" dirty="0">
-                <a:latin typeface="Open Sans" panose="020B0606030504020204" pitchFamily="34" charset="0"/>
-                <a:ea typeface="Open Sans" panose="020B0606030504020204" pitchFamily="34" charset="0"/>
-                <a:cs typeface="Open Sans" panose="020B0606030504020204" pitchFamily="34" charset="0"/>
-              </a:rPr>
-              <a:t>of data drift or data quality issues if unexpected values appear</a:t>
-            </a:r>
-          </a:p>
-          <a:p>
-            <a:pPr lvl="1"/>
-            <a:endParaRPr lang="en-SG" dirty="0">
-              <a:latin typeface="Open Sans" panose="020B0606030504020204" pitchFamily="34" charset="0"/>
-              <a:ea typeface="Open Sans" panose="020B0606030504020204" pitchFamily="34" charset="0"/>
-              <a:cs typeface="Open Sans" panose="020B0606030504020204" pitchFamily="34" charset="0"/>
-            </a:endParaRPr>
-          </a:p>
-          <a:p>
-            <a:pPr marL="285750" indent="-285750">
-              <a:buFont typeface="Arial" panose="020B0604020202020204" pitchFamily="34" charset="0"/>
-              <a:buChar char="•"/>
-            </a:pPr>
-            <a:r>
-              <a:rPr lang="en-SG" dirty="0">
-                <a:latin typeface="Open Sans" panose="020B0606030504020204" pitchFamily="34" charset="0"/>
-                <a:ea typeface="Open Sans" panose="020B0606030504020204" pitchFamily="34" charset="0"/>
-                <a:cs typeface="Open Sans" panose="020B0606030504020204" pitchFamily="34" charset="0"/>
-              </a:rPr>
-              <a:t>Multi-hot encoding relies on expected set of values from gold_config.yaml to apply encoding to all splits (train / validation / test / OOT)</a:t>
-            </a:r>
-          </a:p>
-          <a:p>
-            <a:endParaRPr lang="en-SG" dirty="0">
-              <a:latin typeface="Open Sans" panose="020B0606030504020204" pitchFamily="34" charset="0"/>
-              <a:ea typeface="Open Sans" panose="020B0606030504020204" pitchFamily="34" charset="0"/>
-              <a:cs typeface="Open Sans" panose="020B0606030504020204" pitchFamily="34" charset="0"/>
-            </a:endParaRPr>
-          </a:p>
-          <a:p>
-            <a:r>
-              <a:rPr lang="en-SG" dirty="0">
-                <a:latin typeface="Open Sans" panose="020B0606030504020204" pitchFamily="34" charset="0"/>
-                <a:ea typeface="Open Sans" panose="020B0606030504020204" pitchFamily="34" charset="0"/>
-                <a:cs typeface="Open Sans" panose="020B0606030504020204" pitchFamily="34" charset="0"/>
-              </a:rPr>
-              <a:t>Encoding pipeline for other categorical variables </a:t>
-            </a:r>
-            <a:r>
-              <a:rPr lang="en-SG" b="1" dirty="0">
-                <a:latin typeface="Open Sans" panose="020B0606030504020204" pitchFamily="34" charset="0"/>
-                <a:ea typeface="Open Sans" panose="020B0606030504020204" pitchFamily="34" charset="0"/>
-                <a:cs typeface="Open Sans" panose="020B0606030504020204" pitchFamily="34" charset="0"/>
-              </a:rPr>
-              <a:t>fits only on train dataset </a:t>
-            </a:r>
-            <a:r>
-              <a:rPr lang="en-SG" dirty="0">
-                <a:latin typeface="Open Sans" panose="020B0606030504020204" pitchFamily="34" charset="0"/>
-                <a:ea typeface="Open Sans" panose="020B0606030504020204" pitchFamily="34" charset="0"/>
-                <a:cs typeface="Open Sans" panose="020B0606030504020204" pitchFamily="34" charset="0"/>
-              </a:rPr>
-              <a:t>and </a:t>
-            </a:r>
-            <a:r>
-              <a:rPr lang="en-SG" b="1" dirty="0">
-                <a:latin typeface="Open Sans" panose="020B0606030504020204" pitchFamily="34" charset="0"/>
-                <a:ea typeface="Open Sans" panose="020B0606030504020204" pitchFamily="34" charset="0"/>
-                <a:cs typeface="Open Sans" panose="020B0606030504020204" pitchFamily="34" charset="0"/>
-              </a:rPr>
-              <a:t>transforms other splits </a:t>
-            </a:r>
-            <a:r>
-              <a:rPr lang="en-SG" dirty="0">
-                <a:latin typeface="Open Sans" panose="020B0606030504020204" pitchFamily="34" charset="0"/>
-                <a:ea typeface="Open Sans" panose="020B0606030504020204" pitchFamily="34" charset="0"/>
-                <a:cs typeface="Open Sans" panose="020B0606030504020204" pitchFamily="34" charset="0"/>
-              </a:rPr>
-              <a:t>(test / validation / OOT) using the train fitted pipeline</a:t>
-            </a:r>
-          </a:p>
-          <a:p>
-            <a:pPr marL="285750" indent="-285750">
-              <a:buFont typeface="Wingdings" panose="05000000000000000000" pitchFamily="2" charset="2"/>
-              <a:buChar char="Ø"/>
-            </a:pPr>
-            <a:r>
-              <a:rPr lang="en-SG" b="1" dirty="0">
-                <a:latin typeface="Open Sans" panose="020B0606030504020204" pitchFamily="34" charset="0"/>
-                <a:ea typeface="Open Sans" panose="020B0606030504020204" pitchFamily="34" charset="0"/>
-                <a:cs typeface="Open Sans" panose="020B0606030504020204" pitchFamily="34" charset="0"/>
-              </a:rPr>
-              <a:t>Guarantees no data leakage </a:t>
-            </a:r>
-            <a:r>
-              <a:rPr lang="en-SG" dirty="0">
-                <a:latin typeface="Open Sans" panose="020B0606030504020204" pitchFamily="34" charset="0"/>
-                <a:ea typeface="Open Sans" panose="020B0606030504020204" pitchFamily="34" charset="0"/>
-                <a:cs typeface="Open Sans" panose="020B0606030504020204" pitchFamily="34" charset="0"/>
-              </a:rPr>
-              <a:t>from unseen datasets into training</a:t>
-            </a:r>
-          </a:p>
-          <a:p>
-            <a:pPr marL="285750" indent="-285750">
-              <a:buFont typeface="Wingdings" panose="05000000000000000000" pitchFamily="2" charset="2"/>
-              <a:buChar char="Ø"/>
-            </a:pPr>
-            <a:r>
-              <a:rPr lang="en-SG" dirty="0">
-                <a:latin typeface="Open Sans" panose="020B0606030504020204" pitchFamily="34" charset="0"/>
-                <a:ea typeface="Open Sans" panose="020B0606030504020204" pitchFamily="34" charset="0"/>
-                <a:cs typeface="Open Sans" panose="020B0606030504020204" pitchFamily="34" charset="0"/>
-              </a:rPr>
-              <a:t>All splits result in the same number of columns</a:t>
-            </a:r>
-          </a:p>
-        </p:txBody>
-      </p:sp>
-      <p:pic>
-        <p:nvPicPr>
-          <p:cNvPr id="7" name="Picture 6">
-            <a:extLst>
-              <a:ext uri="{FF2B5EF4-FFF2-40B4-BE49-F238E27FC236}">
-                <a16:creationId xmlns:a16="http://schemas.microsoft.com/office/drawing/2014/main" id="{EF105581-A276-2E3B-ED0E-A683F48D3361}"/>
-              </a:ext>
-            </a:extLst>
-          </p:cNvPr>
-          <p:cNvPicPr>
-            <a:picLocks noChangeAspect="1"/>
-          </p:cNvPicPr>
-          <p:nvPr/>
-        </p:nvPicPr>
-        <p:blipFill>
-          <a:blip r:embed="rId2"/>
-          <a:stretch>
-            <a:fillRect/>
-          </a:stretch>
-        </p:blipFill>
-        <p:spPr>
-          <a:xfrm>
-            <a:off x="9923051" y="2376667"/>
-            <a:ext cx="2051112" cy="2416986"/>
-          </a:xfrm>
-          <a:prstGeom prst="rect">
-            <a:avLst/>
-          </a:prstGeom>
-        </p:spPr>
-      </p:pic>
-      <p:sp>
-        <p:nvSpPr>
-          <p:cNvPr id="10" name="Google Shape;2961;p63">
-            <a:extLst>
-              <a:ext uri="{FF2B5EF4-FFF2-40B4-BE49-F238E27FC236}">
-                <a16:creationId xmlns:a16="http://schemas.microsoft.com/office/drawing/2014/main" id="{AC36AD7B-D575-B163-90F0-7F2C75DE3461}"/>
-              </a:ext>
-            </a:extLst>
-          </p:cNvPr>
-          <p:cNvSpPr txBox="1">
-            <a:spLocks/>
-          </p:cNvSpPr>
-          <p:nvPr/>
-        </p:nvSpPr>
-        <p:spPr>
-          <a:xfrm>
-            <a:off x="1704740" y="307865"/>
-            <a:ext cx="7704000" cy="572700"/>
-          </a:xfrm>
-          <a:prstGeom prst="rect">
-            <a:avLst/>
-          </a:prstGeom>
-        </p:spPr>
-        <p:txBody>
-          <a:bodyPr spcFirstLastPara="1" vert="horz" wrap="square" lIns="91425" tIns="91425" rIns="91425" bIns="91425" rtlCol="0" anchor="t" anchorCtr="0">
-            <a:noAutofit/>
-          </a:bodyPr>
-          <a:lstStyle>
-            <a:lvl1pPr algn="l" defTabSz="914400" rtl="0" eaLnBrk="1" latinLnBrk="0" hangingPunct="1">
-              <a:lnSpc>
-                <a:spcPct val="90000"/>
-              </a:lnSpc>
-              <a:spcBef>
-                <a:spcPct val="0"/>
-              </a:spcBef>
-              <a:buNone/>
-              <a:defRPr sz="4400" kern="1200">
-                <a:solidFill>
-                  <a:schemeClr val="tx1"/>
-                </a:solidFill>
-                <a:latin typeface="+mj-lt"/>
-                <a:ea typeface="+mj-ea"/>
-                <a:cs typeface="+mj-cs"/>
-              </a:defRPr>
-            </a:lvl1pPr>
-          </a:lstStyle>
-          <a:p>
-            <a:r>
-              <a:rPr lang="en-US" sz="2800" dirty="0"/>
-              <a:t>Gold Tables Processing – Pipelining Considerations</a:t>
-            </a:r>
-            <a:endParaRPr lang="en-US" dirty="0"/>
-          </a:p>
-        </p:txBody>
-      </p:sp>
-      <p:grpSp>
-        <p:nvGrpSpPr>
-          <p:cNvPr id="11" name="Google Shape;11537;p106">
-            <a:extLst>
-              <a:ext uri="{FF2B5EF4-FFF2-40B4-BE49-F238E27FC236}">
-                <a16:creationId xmlns:a16="http://schemas.microsoft.com/office/drawing/2014/main" id="{76BEE528-42AD-FA29-F144-38974E97853C}"/>
-              </a:ext>
-            </a:extLst>
-          </p:cNvPr>
-          <p:cNvGrpSpPr/>
-          <p:nvPr/>
-        </p:nvGrpSpPr>
-        <p:grpSpPr>
-          <a:xfrm>
-            <a:off x="836010" y="172356"/>
-            <a:ext cx="712849" cy="762149"/>
-            <a:chOff x="-3771675" y="3971775"/>
-            <a:chExt cx="291300" cy="292025"/>
-          </a:xfrm>
-          <a:solidFill>
-            <a:srgbClr val="FFD700"/>
-          </a:solidFill>
-        </p:grpSpPr>
-        <p:sp>
-          <p:nvSpPr>
-            <p:cNvPr id="12" name="Google Shape;11538;p106">
-              <a:extLst>
-                <a:ext uri="{FF2B5EF4-FFF2-40B4-BE49-F238E27FC236}">
-                  <a16:creationId xmlns:a16="http://schemas.microsoft.com/office/drawing/2014/main" id="{D5DC94E8-BE3E-4921-371D-03D6496A6D63}"/>
-                </a:ext>
-              </a:extLst>
-            </p:cNvPr>
-            <p:cNvSpPr/>
-            <p:nvPr/>
-          </p:nvSpPr>
-          <p:spPr>
-            <a:xfrm>
-              <a:off x="-3770100" y="3971775"/>
-              <a:ext cx="218975" cy="66775"/>
-            </a:xfrm>
-            <a:custGeom>
-              <a:avLst/>
-              <a:gdLst/>
-              <a:ahLst/>
-              <a:cxnLst/>
-              <a:rect l="l" t="t" r="r" b="b"/>
-              <a:pathLst>
-                <a:path w="8759" h="2671" extrusionOk="0">
-                  <a:moveTo>
-                    <a:pt x="4391" y="0"/>
-                  </a:moveTo>
-                  <a:cubicBezTo>
-                    <a:pt x="2410" y="0"/>
-                    <a:pt x="426" y="449"/>
-                    <a:pt x="0" y="1347"/>
-                  </a:cubicBezTo>
-                  <a:cubicBezTo>
-                    <a:pt x="426" y="2229"/>
-                    <a:pt x="2410" y="2670"/>
-                    <a:pt x="4391" y="2670"/>
-                  </a:cubicBezTo>
-                  <a:cubicBezTo>
-                    <a:pt x="6372" y="2670"/>
-                    <a:pt x="8349" y="2229"/>
-                    <a:pt x="8759" y="1347"/>
-                  </a:cubicBezTo>
-                  <a:cubicBezTo>
-                    <a:pt x="8349" y="449"/>
-                    <a:pt x="6372" y="0"/>
-                    <a:pt x="4391" y="0"/>
-                  </a:cubicBezTo>
-                  <a:close/>
-                </a:path>
-              </a:pathLst>
-            </a:custGeom>
-            <a:grpFill/>
-            <a:ln>
-              <a:noFill/>
-            </a:ln>
-          </p:spPr>
-          <p:txBody>
-            <a:bodyPr spcFirstLastPara="1" wrap="square" lIns="91425" tIns="91425" rIns="91425" bIns="91425" anchor="ctr" anchorCtr="0">
-              <a:noAutofit/>
-            </a:bodyPr>
-            <a:lstStyle/>
-            <a:p>
-              <a:pPr marL="0" lvl="0" indent="0" algn="l" rtl="0">
-                <a:spcBef>
-                  <a:spcPts val="0"/>
-                </a:spcBef>
-                <a:spcAft>
-                  <a:spcPts val="0"/>
-                </a:spcAft>
-                <a:buNone/>
-              </a:pPr>
-              <a:endParaRPr/>
-            </a:p>
-          </p:txBody>
-        </p:sp>
-        <p:sp>
-          <p:nvSpPr>
-            <p:cNvPr id="13" name="Google Shape;11539;p106">
-              <a:extLst>
-                <a:ext uri="{FF2B5EF4-FFF2-40B4-BE49-F238E27FC236}">
-                  <a16:creationId xmlns:a16="http://schemas.microsoft.com/office/drawing/2014/main" id="{5EAA81F8-2F1A-945F-D20E-45D5682F7386}"/>
-                </a:ext>
-              </a:extLst>
-            </p:cNvPr>
-            <p:cNvSpPr/>
-            <p:nvPr/>
-          </p:nvSpPr>
-          <p:spPr>
-            <a:xfrm>
-              <a:off x="-3771675" y="4030650"/>
-              <a:ext cx="222125" cy="78000"/>
-            </a:xfrm>
-            <a:custGeom>
-              <a:avLst/>
-              <a:gdLst/>
-              <a:ahLst/>
-              <a:cxnLst/>
-              <a:rect l="l" t="t" r="r" b="b"/>
-              <a:pathLst>
-                <a:path w="8885" h="3120" extrusionOk="0">
-                  <a:moveTo>
-                    <a:pt x="0" y="0"/>
-                  </a:moveTo>
-                  <a:lnTo>
-                    <a:pt x="0" y="1418"/>
-                  </a:lnTo>
-                  <a:cubicBezTo>
-                    <a:pt x="0" y="2521"/>
-                    <a:pt x="2048" y="3088"/>
-                    <a:pt x="4127" y="3119"/>
-                  </a:cubicBezTo>
-                  <a:cubicBezTo>
-                    <a:pt x="4915" y="1891"/>
-                    <a:pt x="6301" y="1103"/>
-                    <a:pt x="7877" y="1103"/>
-                  </a:cubicBezTo>
-                  <a:cubicBezTo>
-                    <a:pt x="8223" y="1103"/>
-                    <a:pt x="8570" y="1135"/>
-                    <a:pt x="8885" y="1229"/>
-                  </a:cubicBezTo>
-                  <a:lnTo>
-                    <a:pt x="8885" y="0"/>
-                  </a:lnTo>
-                  <a:cubicBezTo>
-                    <a:pt x="7908" y="788"/>
-                    <a:pt x="6112" y="1072"/>
-                    <a:pt x="4443" y="1072"/>
-                  </a:cubicBezTo>
-                  <a:cubicBezTo>
-                    <a:pt x="2804" y="1072"/>
-                    <a:pt x="977" y="757"/>
-                    <a:pt x="0" y="0"/>
-                  </a:cubicBezTo>
-                  <a:close/>
-                </a:path>
-              </a:pathLst>
-            </a:custGeom>
-            <a:grpFill/>
-            <a:ln>
-              <a:noFill/>
-            </a:ln>
-          </p:spPr>
-          <p:txBody>
-            <a:bodyPr spcFirstLastPara="1" wrap="square" lIns="91425" tIns="91425" rIns="91425" bIns="91425" anchor="ctr" anchorCtr="0">
-              <a:noAutofit/>
-            </a:bodyPr>
-            <a:lstStyle/>
-            <a:p>
-              <a:pPr marL="0" lvl="0" indent="0" algn="l" rtl="0">
-                <a:spcBef>
-                  <a:spcPts val="0"/>
-                </a:spcBef>
-                <a:spcAft>
-                  <a:spcPts val="0"/>
-                </a:spcAft>
-                <a:buNone/>
-              </a:pPr>
-              <a:endParaRPr/>
-            </a:p>
-          </p:txBody>
-        </p:sp>
-        <p:sp>
-          <p:nvSpPr>
-            <p:cNvPr id="14" name="Google Shape;11540;p106">
-              <a:extLst>
-                <a:ext uri="{FF2B5EF4-FFF2-40B4-BE49-F238E27FC236}">
-                  <a16:creationId xmlns:a16="http://schemas.microsoft.com/office/drawing/2014/main" id="{80F25E0A-FFAD-6DEE-CBA5-EFFCD7FF4C41}"/>
-                </a:ext>
-              </a:extLst>
-            </p:cNvPr>
-            <p:cNvSpPr/>
-            <p:nvPr/>
-          </p:nvSpPr>
-          <p:spPr>
-            <a:xfrm>
-              <a:off x="-3669425" y="4074750"/>
-              <a:ext cx="189050" cy="189050"/>
-            </a:xfrm>
-            <a:custGeom>
-              <a:avLst/>
-              <a:gdLst/>
-              <a:ahLst/>
-              <a:cxnLst/>
-              <a:rect l="l" t="t" r="r" b="b"/>
-              <a:pathLst>
-                <a:path w="7562" h="7562" extrusionOk="0">
-                  <a:moveTo>
-                    <a:pt x="5501" y="2732"/>
-                  </a:moveTo>
-                  <a:cubicBezTo>
-                    <a:pt x="5748" y="2732"/>
-                    <a:pt x="6008" y="3067"/>
-                    <a:pt x="5766" y="3309"/>
-                  </a:cubicBezTo>
-                  <a:lnTo>
-                    <a:pt x="3718" y="5356"/>
-                  </a:lnTo>
-                  <a:cubicBezTo>
-                    <a:pt x="3655" y="5420"/>
-                    <a:pt x="3568" y="5451"/>
-                    <a:pt x="3482" y="5451"/>
-                  </a:cubicBezTo>
-                  <a:cubicBezTo>
-                    <a:pt x="3395" y="5451"/>
-                    <a:pt x="3308" y="5420"/>
-                    <a:pt x="3245" y="5356"/>
-                  </a:cubicBezTo>
-                  <a:lnTo>
-                    <a:pt x="1859" y="4002"/>
-                  </a:lnTo>
-                  <a:cubicBezTo>
-                    <a:pt x="1617" y="3760"/>
-                    <a:pt x="1840" y="3425"/>
-                    <a:pt x="2099" y="3425"/>
-                  </a:cubicBezTo>
-                  <a:cubicBezTo>
-                    <a:pt x="2177" y="3425"/>
-                    <a:pt x="2259" y="3456"/>
-                    <a:pt x="2332" y="3529"/>
-                  </a:cubicBezTo>
-                  <a:lnTo>
-                    <a:pt x="3466" y="4663"/>
-                  </a:lnTo>
-                  <a:lnTo>
-                    <a:pt x="5293" y="2836"/>
-                  </a:lnTo>
-                  <a:cubicBezTo>
-                    <a:pt x="5352" y="2763"/>
-                    <a:pt x="5426" y="2732"/>
-                    <a:pt x="5501" y="2732"/>
-                  </a:cubicBezTo>
-                  <a:close/>
-                  <a:moveTo>
-                    <a:pt x="3781" y="1"/>
-                  </a:moveTo>
-                  <a:cubicBezTo>
-                    <a:pt x="1702" y="1"/>
-                    <a:pt x="0" y="1702"/>
-                    <a:pt x="0" y="3781"/>
-                  </a:cubicBezTo>
-                  <a:cubicBezTo>
-                    <a:pt x="0" y="5892"/>
-                    <a:pt x="1702" y="7562"/>
-                    <a:pt x="3781" y="7562"/>
-                  </a:cubicBezTo>
-                  <a:cubicBezTo>
-                    <a:pt x="5860" y="7562"/>
-                    <a:pt x="7562" y="5892"/>
-                    <a:pt x="7562" y="3781"/>
-                  </a:cubicBezTo>
-                  <a:cubicBezTo>
-                    <a:pt x="7562" y="1702"/>
-                    <a:pt x="5860" y="1"/>
-                    <a:pt x="3781" y="1"/>
-                  </a:cubicBezTo>
-                  <a:close/>
-                </a:path>
-              </a:pathLst>
-            </a:custGeom>
-            <a:grpFill/>
-            <a:ln>
-              <a:noFill/>
-            </a:ln>
-          </p:spPr>
-          <p:txBody>
-            <a:bodyPr spcFirstLastPara="1" wrap="square" lIns="91425" tIns="91425" rIns="91425" bIns="91425" anchor="ctr" anchorCtr="0">
-              <a:noAutofit/>
-            </a:bodyPr>
-            <a:lstStyle/>
-            <a:p>
-              <a:pPr marL="0" lvl="0" indent="0" algn="l" rtl="0">
-                <a:spcBef>
-                  <a:spcPts val="0"/>
-                </a:spcBef>
-                <a:spcAft>
-                  <a:spcPts val="0"/>
-                </a:spcAft>
-                <a:buNone/>
-              </a:pPr>
-              <a:endParaRPr/>
-            </a:p>
-          </p:txBody>
-        </p:sp>
-        <p:sp>
-          <p:nvSpPr>
-            <p:cNvPr id="15" name="Google Shape;11541;p106">
-              <a:extLst>
-                <a:ext uri="{FF2B5EF4-FFF2-40B4-BE49-F238E27FC236}">
-                  <a16:creationId xmlns:a16="http://schemas.microsoft.com/office/drawing/2014/main" id="{E227A422-735E-F21A-F502-61F876DCF04B}"/>
-                </a:ext>
-              </a:extLst>
-            </p:cNvPr>
-            <p:cNvSpPr/>
-            <p:nvPr/>
-          </p:nvSpPr>
-          <p:spPr>
-            <a:xfrm>
-              <a:off x="-3771675" y="4099950"/>
-              <a:ext cx="94525" cy="76425"/>
-            </a:xfrm>
-            <a:custGeom>
-              <a:avLst/>
-              <a:gdLst/>
-              <a:ahLst/>
-              <a:cxnLst/>
-              <a:rect l="l" t="t" r="r" b="b"/>
-              <a:pathLst>
-                <a:path w="3781" h="3057" extrusionOk="0">
-                  <a:moveTo>
-                    <a:pt x="0" y="1"/>
-                  </a:moveTo>
-                  <a:lnTo>
-                    <a:pt x="0" y="1419"/>
-                  </a:lnTo>
-                  <a:cubicBezTo>
-                    <a:pt x="0" y="2364"/>
-                    <a:pt x="1607" y="2899"/>
-                    <a:pt x="3434" y="3057"/>
-                  </a:cubicBezTo>
-                  <a:cubicBezTo>
-                    <a:pt x="3371" y="2364"/>
-                    <a:pt x="3497" y="1671"/>
-                    <a:pt x="3781" y="1040"/>
-                  </a:cubicBezTo>
-                  <a:cubicBezTo>
-                    <a:pt x="2332" y="977"/>
-                    <a:pt x="819" y="662"/>
-                    <a:pt x="0" y="1"/>
-                  </a:cubicBezTo>
-                  <a:close/>
-                </a:path>
-              </a:pathLst>
-            </a:custGeom>
-            <a:grpFill/>
-            <a:ln>
-              <a:noFill/>
-            </a:ln>
-          </p:spPr>
-          <p:txBody>
-            <a:bodyPr spcFirstLastPara="1" wrap="square" lIns="91425" tIns="91425" rIns="91425" bIns="91425" anchor="ctr" anchorCtr="0">
-              <a:noAutofit/>
-            </a:bodyPr>
-            <a:lstStyle/>
-            <a:p>
-              <a:pPr marL="0" lvl="0" indent="0" algn="l" rtl="0">
-                <a:spcBef>
-                  <a:spcPts val="0"/>
-                </a:spcBef>
-                <a:spcAft>
-                  <a:spcPts val="0"/>
-                </a:spcAft>
-                <a:buNone/>
-              </a:pPr>
-              <a:endParaRPr/>
-            </a:p>
-          </p:txBody>
-        </p:sp>
-        <p:sp>
-          <p:nvSpPr>
-            <p:cNvPr id="16" name="Google Shape;11542;p106">
-              <a:extLst>
-                <a:ext uri="{FF2B5EF4-FFF2-40B4-BE49-F238E27FC236}">
-                  <a16:creationId xmlns:a16="http://schemas.microsoft.com/office/drawing/2014/main" id="{3CA29FD0-E3F6-E0C9-3C55-D3AE1B1748E1}"/>
-                </a:ext>
-              </a:extLst>
-            </p:cNvPr>
-            <p:cNvSpPr/>
-            <p:nvPr/>
-          </p:nvSpPr>
-          <p:spPr>
-            <a:xfrm>
-              <a:off x="-3771675" y="4167700"/>
-              <a:ext cx="135500" cy="95325"/>
-            </a:xfrm>
-            <a:custGeom>
-              <a:avLst/>
-              <a:gdLst/>
-              <a:ahLst/>
-              <a:cxnLst/>
-              <a:rect l="l" t="t" r="r" b="b"/>
-              <a:pathLst>
-                <a:path w="5420" h="3813" extrusionOk="0">
-                  <a:moveTo>
-                    <a:pt x="0" y="0"/>
-                  </a:moveTo>
-                  <a:lnTo>
-                    <a:pt x="0" y="2111"/>
-                  </a:lnTo>
-                  <a:cubicBezTo>
-                    <a:pt x="0" y="3277"/>
-                    <a:pt x="2237" y="3812"/>
-                    <a:pt x="4443" y="3812"/>
-                  </a:cubicBezTo>
-                  <a:cubicBezTo>
-                    <a:pt x="4789" y="3812"/>
-                    <a:pt x="5104" y="3812"/>
-                    <a:pt x="5419" y="3781"/>
-                  </a:cubicBezTo>
-                  <a:cubicBezTo>
-                    <a:pt x="4474" y="3151"/>
-                    <a:pt x="3781" y="2206"/>
-                    <a:pt x="3529" y="1071"/>
-                  </a:cubicBezTo>
-                  <a:cubicBezTo>
-                    <a:pt x="2174" y="977"/>
-                    <a:pt x="788" y="662"/>
-                    <a:pt x="0" y="0"/>
-                  </a:cubicBezTo>
-                  <a:close/>
-                </a:path>
-              </a:pathLst>
-            </a:custGeom>
-            <a:grpFill/>
-            <a:ln>
-              <a:noFill/>
-            </a:ln>
-          </p:spPr>
-          <p:txBody>
-            <a:bodyPr spcFirstLastPara="1" wrap="square" lIns="91425" tIns="91425" rIns="91425" bIns="91425" anchor="ctr" anchorCtr="0">
-              <a:noAutofit/>
-            </a:bodyPr>
-            <a:lstStyle/>
-            <a:p>
-              <a:pPr marL="0" lvl="0" indent="0" algn="l" rtl="0">
-                <a:spcBef>
-                  <a:spcPts val="0"/>
-                </a:spcBef>
-                <a:spcAft>
-                  <a:spcPts val="0"/>
-                </a:spcAft>
-                <a:buNone/>
-              </a:pPr>
-              <a:endParaRPr/>
-            </a:p>
-          </p:txBody>
-        </p:sp>
-      </p:grpSp>
-    </p:spTree>
-    <p:extLst>
-      <p:ext uri="{BB962C8B-B14F-4D97-AF65-F5344CB8AC3E}">
-        <p14:creationId xmlns:p14="http://schemas.microsoft.com/office/powerpoint/2010/main" val="417030275"/>
-      </p:ext>
-    </p:extLst>
-  </p:cSld>
-  <p:clrMapOvr>
-    <a:masterClrMapping/>
-  </p:clrMapOvr>
-</p:sld>
-</file>
-
-<file path=ppt/slides/slide11.xml><?xml version="1.0" encoding="utf-8"?>
-<p:sld xmlns:a="http://schemas.openxmlformats.org/drawingml/2006/main" xmlns:r="http://schemas.openxmlformats.org/officeDocument/2006/relationships" xmlns:p="http://schemas.openxmlformats.org/presentationml/2006/main">
-  <p:cSld>
-    <p:spTree>
-      <p:nvGrpSpPr>
-        <p:cNvPr id="1" name=""/>
-        <p:cNvGrpSpPr/>
-        <p:nvPr/>
-      </p:nvGrpSpPr>
-      <p:grpSpPr>
-        <a:xfrm>
-          <a:off x="0" y="0"/>
-          <a:ext cx="0" cy="0"/>
-          <a:chOff x="0" y="0"/>
-          <a:chExt cx="0" cy="0"/>
-        </a:xfrm>
-      </p:grpSpPr>
       <p:graphicFrame>
         <p:nvGraphicFramePr>
           <p:cNvPr id="5" name="Table 4">
@@ -4462,14 +3589,14 @@
           <p:nvPr>
             <p:extLst>
               <p:ext uri="{D42A27DB-BD31-4B8C-83A1-F6EECF244321}">
-                <p14:modId xmlns:p14="http://schemas.microsoft.com/office/powerpoint/2010/main" val="898504063"/>
+                <p14:modId xmlns:p14="http://schemas.microsoft.com/office/powerpoint/2010/main" val="2561435729"/>
               </p:ext>
             </p:extLst>
           </p:nvPr>
         </p:nvGraphicFramePr>
         <p:xfrm>
           <a:off x="447085" y="965753"/>
-          <a:ext cx="11297829" cy="3489116"/>
+          <a:ext cx="11297829" cy="3831594"/>
         </p:xfrm>
         <a:graphic>
           <a:graphicData uri="http://schemas.openxmlformats.org/drawingml/2006/table">
@@ -5409,6 +4536,93 @@
                   </a:ext>
                 </a:extLst>
               </a:tr>
+              <a:tr h="342478">
+                <a:tc>
+                  <a:txBody>
+                    <a:bodyPr/>
+                    <a:lstStyle/>
+                    <a:p>
+                      <a:r>
+                        <a:rPr lang="en-SG" sz="1100" dirty="0"/>
+                        <a:t>fe_1 – fe_20</a:t>
+                      </a:r>
+                    </a:p>
+                  </a:txBody>
+                  <a:tcPr anchor="ctr"/>
+                </a:tc>
+                <a:tc>
+                  <a:txBody>
+                    <a:bodyPr/>
+                    <a:lstStyle/>
+                    <a:p>
+                      <a:r>
+                        <a:rPr lang="en-SG" sz="1100" dirty="0"/>
+                        <a:t>Float</a:t>
+                      </a:r>
+                    </a:p>
+                  </a:txBody>
+                  <a:tcPr anchor="ctr"/>
+                </a:tc>
+                <a:tc>
+                  <a:txBody>
+                    <a:bodyPr/>
+                    <a:lstStyle/>
+                    <a:p>
+                      <a:r>
+                        <a:rPr lang="en-SG" sz="1100" dirty="0"/>
+                        <a:t>Absence of digital activity / profile – to confirm with business</a:t>
+                      </a:r>
+                    </a:p>
+                  </a:txBody>
+                  <a:tcPr anchor="ctr"/>
+                </a:tc>
+                <a:tc>
+                  <a:txBody>
+                    <a:bodyPr/>
+                    <a:lstStyle/>
+                    <a:p>
+                      <a:r>
+                        <a:rPr lang="en-SG" sz="1100" dirty="0"/>
+                        <a:t>Impute 0</a:t>
+                      </a:r>
+                    </a:p>
+                  </a:txBody>
+                  <a:tcPr anchor="ctr"/>
+                </a:tc>
+                <a:tc>
+                  <a:txBody>
+                    <a:bodyPr/>
+                    <a:lstStyle/>
+                    <a:p>
+                      <a:pPr algn="ctr"/>
+                      <a:r>
+                        <a:rPr lang="en-SG" sz="1100" dirty="0"/>
+                        <a:t>3,526</a:t>
+                      </a:r>
+                    </a:p>
+                  </a:txBody>
+                  <a:tcPr anchor="ctr"/>
+                </a:tc>
+                <a:tc>
+                  <a:txBody>
+                    <a:bodyPr/>
+                    <a:lstStyle/>
+                    <a:p>
+                      <a:pPr algn="ctr"/>
+                      <a:r>
+                        <a:rPr lang="en-SG" sz="1100" dirty="0"/>
+                        <a:t>28.21%</a:t>
+                      </a:r>
+                    </a:p>
+                  </a:txBody>
+                  <a:tcPr anchor="ctr"/>
+                </a:tc>
+                <a:extLst>
+                  <a:ext uri="{0D108BD9-81ED-4DB2-BD59-A6C34878D82A}">
+                    <a16:rowId xmlns:a16="http://schemas.microsoft.com/office/drawing/2014/main" val="1404101781"/>
+                  </a:ext>
+                </a:extLst>
+              </a:tr>
             </a:tbl>
           </a:graphicData>
         </a:graphic>
@@ -5428,13 +4642,13 @@
           <p:nvPr>
             <p:extLst>
               <p:ext uri="{D42A27DB-BD31-4B8C-83A1-F6EECF244321}">
-                <p14:modId xmlns:p14="http://schemas.microsoft.com/office/powerpoint/2010/main" val="1209538461"/>
+                <p14:modId xmlns:p14="http://schemas.microsoft.com/office/powerpoint/2010/main" val="3294905683"/>
               </p:ext>
             </p:extLst>
           </p:nvPr>
         </p:nvGraphicFramePr>
         <p:xfrm>
-          <a:off x="447085" y="4658619"/>
+          <a:off x="447085" y="4999088"/>
           <a:ext cx="11297829" cy="1544136"/>
         </p:xfrm>
         <a:graphic>
@@ -6325,7 +5539,7 @@
 </p:sld>
 </file>
 
-<file path=ppt/slides/slide12.xml><?xml version="1.0" encoding="utf-8"?>
+<file path=ppt/slides/slide11.xml><?xml version="1.0" encoding="utf-8"?>
 <p:sld xmlns:a="http://schemas.openxmlformats.org/drawingml/2006/main" xmlns:r="http://schemas.openxmlformats.org/officeDocument/2006/relationships" xmlns:p="http://schemas.openxmlformats.org/presentationml/2006/main" show="0">
   <p:cSld>
     <p:spTree>
@@ -8570,7 +7784,7 @@
 </p:sld>
 </file>
 
-<file path=ppt/slides/slide13.xml><?xml version="1.0" encoding="utf-8"?>
+<file path=ppt/slides/slide12.xml><?xml version="1.0" encoding="utf-8"?>
 <p:sld xmlns:a="http://schemas.openxmlformats.org/drawingml/2006/main" xmlns:r="http://schemas.openxmlformats.org/officeDocument/2006/relationships" xmlns:p="http://schemas.openxmlformats.org/presentationml/2006/main" show="0">
   <p:cSld>
     <p:spTree>
@@ -8848,76 +8062,6 @@
   <p:cSld>
     <p:spTree>
       <p:nvGrpSpPr>
-        <p:cNvPr id="1" name=""/>
-        <p:cNvGrpSpPr/>
-        <p:nvPr/>
-      </p:nvGrpSpPr>
-      <p:grpSpPr>
-        <a:xfrm>
-          <a:off x="0" y="0"/>
-          <a:ext cx="0" cy="0"/>
-          <a:chOff x="0" y="0"/>
-          <a:chExt cx="0" cy="0"/>
-        </a:xfrm>
-      </p:grpSpPr>
-      <p:sp>
-        <p:nvSpPr>
-          <p:cNvPr id="4" name="Google Shape;2961;p63">
-            <a:extLst>
-              <a:ext uri="{FF2B5EF4-FFF2-40B4-BE49-F238E27FC236}">
-                <a16:creationId xmlns:a16="http://schemas.microsoft.com/office/drawing/2014/main" id="{2C4618A1-9492-9CA3-56EE-649FE3326ADF}"/>
-              </a:ext>
-            </a:extLst>
-          </p:cNvPr>
-          <p:cNvSpPr txBox="1">
-            <a:spLocks noGrp="1"/>
-          </p:cNvSpPr>
-          <p:nvPr>
-            <p:ph type="title"/>
-          </p:nvPr>
-        </p:nvSpPr>
-        <p:spPr>
-          <a:xfrm>
-            <a:off x="720000" y="307865"/>
-            <a:ext cx="7704000" cy="572700"/>
-          </a:xfrm>
-          <a:prstGeom prst="rect">
-            <a:avLst/>
-          </a:prstGeom>
-        </p:spPr>
-        <p:txBody>
-          <a:bodyPr spcFirstLastPara="1" wrap="square" lIns="91425" tIns="91425" rIns="91425" bIns="91425" anchor="t" anchorCtr="0">
-            <a:noAutofit/>
-          </a:bodyPr>
-          <a:lstStyle/>
-          <a:p>
-            <a:pPr lvl="0" algn="l"/>
-            <a:r>
-              <a:rPr lang="en-US" sz="2800" dirty="0"/>
-              <a:t>Objectives</a:t>
-            </a:r>
-            <a:endParaRPr dirty="0"/>
-          </a:p>
-        </p:txBody>
-      </p:sp>
-    </p:spTree>
-    <p:extLst>
-      <p:ext uri="{BB962C8B-B14F-4D97-AF65-F5344CB8AC3E}">
-        <p14:creationId xmlns:p14="http://schemas.microsoft.com/office/powerpoint/2010/main" val="3938434989"/>
-      </p:ext>
-    </p:extLst>
-  </p:cSld>
-  <p:clrMapOvr>
-    <a:masterClrMapping/>
-  </p:clrMapOvr>
-</p:sld>
-</file>
-
-<file path=ppt/slides/slide3.xml><?xml version="1.0" encoding="utf-8"?>
-<p:sld xmlns:a="http://schemas.openxmlformats.org/drawingml/2006/main" xmlns:r="http://schemas.openxmlformats.org/officeDocument/2006/relationships" xmlns:p="http://schemas.openxmlformats.org/presentationml/2006/main">
-  <p:cSld>
-    <p:spTree>
-      <p:nvGrpSpPr>
         <p:cNvPr id="1" name="">
           <a:extLst>
             <a:ext uri="{FF2B5EF4-FFF2-40B4-BE49-F238E27FC236}">
@@ -11722,7 +10866,7 @@
 </p:sld>
 </file>
 
-<file path=ppt/slides/slide4.xml><?xml version="1.0" encoding="utf-8"?>
+<file path=ppt/slides/slide3.xml><?xml version="1.0" encoding="utf-8"?>
 <p:sld xmlns:a="http://schemas.openxmlformats.org/drawingml/2006/main" xmlns:r="http://schemas.openxmlformats.org/officeDocument/2006/relationships" xmlns:p="http://schemas.openxmlformats.org/presentationml/2006/main">
   <p:cSld>
     <p:spTree>
@@ -12234,7 +11378,7 @@
 </p:sld>
 </file>
 
-<file path=ppt/slides/slide5.xml><?xml version="1.0" encoding="utf-8"?>
+<file path=ppt/slides/slide4.xml><?xml version="1.0" encoding="utf-8"?>
 <p:sld xmlns:a="http://schemas.openxmlformats.org/drawingml/2006/main" xmlns:r="http://schemas.openxmlformats.org/officeDocument/2006/relationships" xmlns:p="http://schemas.openxmlformats.org/presentationml/2006/main">
   <p:cSld>
     <p:spTree>
@@ -13037,7 +12181,7 @@
 </p:sld>
 </file>
 
-<file path=ppt/slides/slide6.xml><?xml version="1.0" encoding="utf-8"?>
+<file path=ppt/slides/slide5.xml><?xml version="1.0" encoding="utf-8"?>
 <p:sld xmlns:a="http://schemas.openxmlformats.org/drawingml/2006/main" xmlns:r="http://schemas.openxmlformats.org/officeDocument/2006/relationships" xmlns:p="http://schemas.openxmlformats.org/presentationml/2006/main">
   <p:cSld>
     <p:spTree>
@@ -14947,7 +14091,7 @@
 </p:sld>
 </file>
 
-<file path=ppt/slides/slide7.xml><?xml version="1.0" encoding="utf-8"?>
+<file path=ppt/slides/slide6.xml><?xml version="1.0" encoding="utf-8"?>
 <p:sld xmlns:a="http://schemas.openxmlformats.org/drawingml/2006/main" xmlns:r="http://schemas.openxmlformats.org/officeDocument/2006/relationships" xmlns:p="http://schemas.openxmlformats.org/presentationml/2006/main">
   <p:cSld>
     <p:spTree>
@@ -17102,7 +16246,7 @@
 </p:sld>
 </file>
 
-<file path=ppt/slides/slide8.xml><?xml version="1.0" encoding="utf-8"?>
+<file path=ppt/slides/slide7.xml><?xml version="1.0" encoding="utf-8"?>
 <p:sld xmlns:a="http://schemas.openxmlformats.org/drawingml/2006/main" xmlns:r="http://schemas.openxmlformats.org/officeDocument/2006/relationships" xmlns:p="http://schemas.openxmlformats.org/presentationml/2006/main">
   <p:cSld>
     <p:spTree>
@@ -17718,23 +16862,7 @@
                 <a:ea typeface="Open Sans" panose="020B0606030504020204" pitchFamily="34" charset="0"/>
                 <a:cs typeface="Open Sans" panose="020B0606030504020204" pitchFamily="34" charset="0"/>
               </a:rPr>
-              <a:t>“</a:t>
-            </a:r>
-            <a:r>
-              <a:rPr lang="en-SG" sz="1200" b="1" dirty="0" err="1">
-                <a:latin typeface="Open Sans" panose="020B0606030504020204" pitchFamily="34" charset="0"/>
-                <a:ea typeface="Open Sans" panose="020B0606030504020204" pitchFamily="34" charset="0"/>
-                <a:cs typeface="Open Sans" panose="020B0606030504020204" pitchFamily="34" charset="0"/>
-              </a:rPr>
-              <a:t>months_available</a:t>
-            </a:r>
-            <a:r>
-              <a:rPr lang="en-SG" sz="1200" b="1" dirty="0">
-                <a:latin typeface="Open Sans" panose="020B0606030504020204" pitchFamily="34" charset="0"/>
-                <a:ea typeface="Open Sans" panose="020B0606030504020204" pitchFamily="34" charset="0"/>
-                <a:cs typeface="Open Sans" panose="020B0606030504020204" pitchFamily="34" charset="0"/>
-              </a:rPr>
-              <a:t>”</a:t>
+              <a:t>“months_available”</a:t>
             </a:r>
             <a:r>
               <a:rPr lang="en-SG" sz="1200" dirty="0">
@@ -17936,7 +17064,7 @@
                 <a:ea typeface="Open Sans" panose="020B0606030504020204" pitchFamily="34" charset="0"/>
                 <a:cs typeface="Open Sans" panose="020B0606030504020204" pitchFamily="34" charset="0"/>
               </a:rPr>
-              <a:t>rather than data quality issues	</a:t>
+              <a:t>rather than data quality issues		</a:t>
             </a:r>
             <a:r>
               <a:rPr lang="en-SG" b="1" dirty="0">
@@ -18487,7 +17615,7 @@
 </p:sld>
 </file>
 
-<file path=ppt/slides/slide9.xml><?xml version="1.0" encoding="utf-8"?>
+<file path=ppt/slides/slide8.xml><?xml version="1.0" encoding="utf-8"?>
 <p:sld xmlns:a="http://schemas.openxmlformats.org/drawingml/2006/main" xmlns:r="http://schemas.openxmlformats.org/officeDocument/2006/relationships" xmlns:p="http://schemas.openxmlformats.org/presentationml/2006/main">
   <p:cSld>
     <p:spTree>
@@ -18883,23 +18011,7 @@
                 <a:ea typeface="Open Sans" panose="020B0606030504020204" pitchFamily="34" charset="0"/>
                 <a:cs typeface="Open Sans" panose="020B0606030504020204" pitchFamily="34" charset="0"/>
               </a:rPr>
-              <a:t>(identifiers to be dropped during ML pipeline) and designed based on requirements for a tree based model – (no scaling applied). Encoding format is designed to be compatible with most scikit-learn models rather than </a:t>
-            </a:r>
-            <a:r>
-              <a:rPr lang="en-SG" sz="1400" dirty="0" err="1">
-                <a:latin typeface="Open Sans" panose="020B0606030504020204" pitchFamily="34" charset="0"/>
-                <a:ea typeface="Open Sans" panose="020B0606030504020204" pitchFamily="34" charset="0"/>
-                <a:cs typeface="Open Sans" panose="020B0606030504020204" pitchFamily="34" charset="0"/>
-              </a:rPr>
-              <a:t>SparkML</a:t>
-            </a:r>
-            <a:r>
-              <a:rPr lang="en-SG" sz="1400" dirty="0">
-                <a:latin typeface="Open Sans" panose="020B0606030504020204" pitchFamily="34" charset="0"/>
-                <a:ea typeface="Open Sans" panose="020B0606030504020204" pitchFamily="34" charset="0"/>
-                <a:cs typeface="Open Sans" panose="020B0606030504020204" pitchFamily="34" charset="0"/>
-              </a:rPr>
-              <a:t> models.</a:t>
+              <a:t>(identifiers to be dropped during ML pipeline) and designed based on requirements for a tree based model – (no scaling applied). Encoding format is designed to be compatible with most scikit-learn models rather than SparkML models.</a:t>
             </a:r>
           </a:p>
         </p:txBody>
@@ -19577,6 +18689,878 @@
     <p:extLst>
       <p:ext uri="{BB962C8B-B14F-4D97-AF65-F5344CB8AC3E}">
         <p14:creationId xmlns:p14="http://schemas.microsoft.com/office/powerpoint/2010/main" val="249126695"/>
+      </p:ext>
+    </p:extLst>
+  </p:cSld>
+  <p:clrMapOvr>
+    <a:masterClrMapping/>
+  </p:clrMapOvr>
+</p:sld>
+</file>
+
+<file path=ppt/slides/slide9.xml><?xml version="1.0" encoding="utf-8"?>
+<p:sld xmlns:a="http://schemas.openxmlformats.org/drawingml/2006/main" xmlns:r="http://schemas.openxmlformats.org/officeDocument/2006/relationships" xmlns:p="http://schemas.openxmlformats.org/presentationml/2006/main">
+  <p:cSld>
+    <p:spTree>
+      <p:nvGrpSpPr>
+        <p:cNvPr id="1" name=""/>
+        <p:cNvGrpSpPr/>
+        <p:nvPr/>
+      </p:nvGrpSpPr>
+      <p:grpSpPr>
+        <a:xfrm>
+          <a:off x="0" y="0"/>
+          <a:ext cx="0" cy="0"/>
+          <a:chOff x="0" y="0"/>
+          <a:chExt cx="0" cy="0"/>
+        </a:xfrm>
+      </p:grpSpPr>
+      <p:sp>
+        <p:nvSpPr>
+          <p:cNvPr id="5" name="TextBox 4">
+            <a:extLst>
+              <a:ext uri="{FF2B5EF4-FFF2-40B4-BE49-F238E27FC236}">
+                <a16:creationId xmlns:a16="http://schemas.microsoft.com/office/drawing/2014/main" id="{5E134DFD-233C-F8B4-CD07-FEBA3D756A45}"/>
+              </a:ext>
+            </a:extLst>
+          </p:cNvPr>
+          <p:cNvSpPr txBox="1"/>
+          <p:nvPr/>
+        </p:nvSpPr>
+        <p:spPr>
+          <a:xfrm>
+            <a:off x="623017" y="999837"/>
+            <a:ext cx="9422683" cy="5170646"/>
+          </a:xfrm>
+          <a:prstGeom prst="rect">
+            <a:avLst/>
+          </a:prstGeom>
+          <a:noFill/>
+        </p:spPr>
+        <p:txBody>
+          <a:bodyPr wrap="square" rtlCol="0">
+            <a:spAutoFit/>
+          </a:bodyPr>
+          <a:lstStyle/>
+          <a:p>
+            <a:r>
+              <a:rPr lang="en-SG" sz="2400" b="1" u="sng" dirty="0">
+                <a:latin typeface="Open Sans" panose="020B0606030504020204" pitchFamily="34" charset="0"/>
+                <a:ea typeface="Open Sans" panose="020B0606030504020204" pitchFamily="34" charset="0"/>
+                <a:cs typeface="Open Sans" panose="020B0606030504020204" pitchFamily="34" charset="0"/>
+              </a:rPr>
+              <a:t>Encoding Decisioning</a:t>
+            </a:r>
+            <a:endParaRPr lang="en-SG" b="1" u="sng" dirty="0">
+              <a:latin typeface="Open Sans" panose="020B0606030504020204" pitchFamily="34" charset="0"/>
+              <a:ea typeface="Open Sans" panose="020B0606030504020204" pitchFamily="34" charset="0"/>
+              <a:cs typeface="Open Sans" panose="020B0606030504020204" pitchFamily="34" charset="0"/>
+            </a:endParaRPr>
+          </a:p>
+          <a:p>
+            <a:endParaRPr lang="en-SG" dirty="0">
+              <a:latin typeface="Open Sans" panose="020B0606030504020204" pitchFamily="34" charset="0"/>
+              <a:ea typeface="Open Sans" panose="020B0606030504020204" pitchFamily="34" charset="0"/>
+              <a:cs typeface="Open Sans" panose="020B0606030504020204" pitchFamily="34" charset="0"/>
+            </a:endParaRPr>
+          </a:p>
+          <a:p>
+            <a:r>
+              <a:rPr lang="en-SG" dirty="0">
+                <a:latin typeface="Open Sans" panose="020B0606030504020204" pitchFamily="34" charset="0"/>
+                <a:ea typeface="Open Sans" panose="020B0606030504020204" pitchFamily="34" charset="0"/>
+                <a:cs typeface="Open Sans" panose="020B0606030504020204" pitchFamily="34" charset="0"/>
+              </a:rPr>
+              <a:t>Create and maintain a </a:t>
+            </a:r>
+            <a:r>
+              <a:rPr lang="en-SG" b="1" dirty="0">
+                <a:latin typeface="Open Sans" panose="020B0606030504020204" pitchFamily="34" charset="0"/>
+                <a:ea typeface="Open Sans" panose="020B0606030504020204" pitchFamily="34" charset="0"/>
+                <a:cs typeface="Open Sans" panose="020B0606030504020204" pitchFamily="34" charset="0"/>
+              </a:rPr>
+              <a:t>gold_config.yaml</a:t>
+            </a:r>
+            <a:r>
+              <a:rPr lang="en-SG" dirty="0">
+                <a:latin typeface="Open Sans" panose="020B0606030504020204" pitchFamily="34" charset="0"/>
+                <a:ea typeface="Open Sans" panose="020B0606030504020204" pitchFamily="34" charset="0"/>
+                <a:cs typeface="Open Sans" panose="020B0606030504020204" pitchFamily="34" charset="0"/>
+              </a:rPr>
+              <a:t> file for features which are expected to contain only </a:t>
+            </a:r>
+            <a:r>
+              <a:rPr lang="en-SG" b="1" dirty="0">
+                <a:latin typeface="Open Sans" panose="020B0606030504020204" pitchFamily="34" charset="0"/>
+                <a:ea typeface="Open Sans" panose="020B0606030504020204" pitchFamily="34" charset="0"/>
+                <a:cs typeface="Open Sans" panose="020B0606030504020204" pitchFamily="34" charset="0"/>
+              </a:rPr>
+              <a:t>business approved values</a:t>
+            </a:r>
+          </a:p>
+          <a:p>
+            <a:endParaRPr lang="en-SG" b="1" dirty="0">
+              <a:latin typeface="Open Sans" panose="020B0606030504020204" pitchFamily="34" charset="0"/>
+              <a:ea typeface="Open Sans" panose="020B0606030504020204" pitchFamily="34" charset="0"/>
+              <a:cs typeface="Open Sans" panose="020B0606030504020204" pitchFamily="34" charset="0"/>
+            </a:endParaRPr>
+          </a:p>
+          <a:p>
+            <a:pPr marL="285750" indent="-285750">
+              <a:buFont typeface="Arial" panose="020B0604020202020204" pitchFamily="34" charset="0"/>
+              <a:buChar char="•"/>
+            </a:pPr>
+            <a:r>
+              <a:rPr lang="en-SG" dirty="0">
+                <a:latin typeface="Open Sans" panose="020B0606030504020204" pitchFamily="34" charset="0"/>
+                <a:ea typeface="Open Sans" panose="020B0606030504020204" pitchFamily="34" charset="0"/>
+                <a:cs typeface="Open Sans" panose="020B0606030504020204" pitchFamily="34" charset="0"/>
+              </a:rPr>
+              <a:t>Processing pipeline verifies that columns like “Types_of_Loan” contain only approved list of values</a:t>
+            </a:r>
+          </a:p>
+          <a:p>
+            <a:pPr marL="742950" lvl="1" indent="-285750">
+              <a:buFont typeface="Wingdings" panose="05000000000000000000" pitchFamily="2" charset="2"/>
+              <a:buChar char="Ø"/>
+            </a:pPr>
+            <a:r>
+              <a:rPr lang="en-SG" dirty="0">
+                <a:latin typeface="Open Sans" panose="020B0606030504020204" pitchFamily="34" charset="0"/>
+                <a:ea typeface="Open Sans" panose="020B0606030504020204" pitchFamily="34" charset="0"/>
+                <a:cs typeface="Open Sans" panose="020B0606030504020204" pitchFamily="34" charset="0"/>
+              </a:rPr>
+              <a:t>Adopt </a:t>
+            </a:r>
+            <a:r>
+              <a:rPr lang="en-SG" b="1" dirty="0">
+                <a:latin typeface="Open Sans" panose="020B0606030504020204" pitchFamily="34" charset="0"/>
+                <a:ea typeface="Open Sans" panose="020B0606030504020204" pitchFamily="34" charset="0"/>
+                <a:cs typeface="Open Sans" panose="020B0606030504020204" pitchFamily="34" charset="0"/>
+              </a:rPr>
+              <a:t>lenient policy –</a:t>
+            </a:r>
+            <a:r>
+              <a:rPr lang="en-SG" dirty="0">
+                <a:latin typeface="Open Sans" panose="020B0606030504020204" pitchFamily="34" charset="0"/>
+                <a:ea typeface="Open Sans" panose="020B0606030504020204" pitchFamily="34" charset="0"/>
+                <a:cs typeface="Open Sans" panose="020B0606030504020204" pitchFamily="34" charset="0"/>
+              </a:rPr>
+              <a:t> log warning and ignore unapproved values</a:t>
+            </a:r>
+          </a:p>
+          <a:p>
+            <a:pPr marL="742950" lvl="1" indent="-285750">
+              <a:buFont typeface="Wingdings" panose="05000000000000000000" pitchFamily="2" charset="2"/>
+              <a:buChar char="Ø"/>
+            </a:pPr>
+            <a:r>
+              <a:rPr lang="en-SG" dirty="0">
+                <a:latin typeface="Open Sans" panose="020B0606030504020204" pitchFamily="34" charset="0"/>
+                <a:ea typeface="Open Sans" panose="020B0606030504020204" pitchFamily="34" charset="0"/>
+                <a:cs typeface="Open Sans" panose="020B0606030504020204" pitchFamily="34" charset="0"/>
+              </a:rPr>
+              <a:t>Ensures </a:t>
+            </a:r>
+            <a:r>
+              <a:rPr lang="en-SG" b="1" dirty="0">
+                <a:latin typeface="Open Sans" panose="020B0606030504020204" pitchFamily="34" charset="0"/>
+                <a:ea typeface="Open Sans" panose="020B0606030504020204" pitchFamily="34" charset="0"/>
+                <a:cs typeface="Open Sans" panose="020B0606030504020204" pitchFamily="34" charset="0"/>
+              </a:rPr>
+              <a:t>stability of gold table schema</a:t>
+            </a:r>
+            <a:r>
+              <a:rPr lang="en-SG" dirty="0">
+                <a:latin typeface="Open Sans" panose="020B0606030504020204" pitchFamily="34" charset="0"/>
+                <a:ea typeface="Open Sans" panose="020B0606030504020204" pitchFamily="34" charset="0"/>
+                <a:cs typeface="Open Sans" panose="020B0606030504020204" pitchFamily="34" charset="0"/>
+              </a:rPr>
+              <a:t> (after multi-hot-encoding)</a:t>
+            </a:r>
+          </a:p>
+          <a:p>
+            <a:pPr marL="742950" lvl="1" indent="-285750">
+              <a:buFont typeface="Wingdings" panose="05000000000000000000" pitchFamily="2" charset="2"/>
+              <a:buChar char="Ø"/>
+            </a:pPr>
+            <a:r>
+              <a:rPr lang="en-SG" b="1" dirty="0">
+                <a:latin typeface="Open Sans" panose="020B0606030504020204" pitchFamily="34" charset="0"/>
+                <a:ea typeface="Open Sans" panose="020B0606030504020204" pitchFamily="34" charset="0"/>
+                <a:cs typeface="Open Sans" panose="020B0606030504020204" pitchFamily="34" charset="0"/>
+              </a:rPr>
+              <a:t>Early detection </a:t>
+            </a:r>
+            <a:r>
+              <a:rPr lang="en-SG" dirty="0">
+                <a:latin typeface="Open Sans" panose="020B0606030504020204" pitchFamily="34" charset="0"/>
+                <a:ea typeface="Open Sans" panose="020B0606030504020204" pitchFamily="34" charset="0"/>
+                <a:cs typeface="Open Sans" panose="020B0606030504020204" pitchFamily="34" charset="0"/>
+              </a:rPr>
+              <a:t>of data drift or data quality issues if unexpected values appear</a:t>
+            </a:r>
+          </a:p>
+          <a:p>
+            <a:pPr lvl="1"/>
+            <a:endParaRPr lang="en-SG" dirty="0">
+              <a:latin typeface="Open Sans" panose="020B0606030504020204" pitchFamily="34" charset="0"/>
+              <a:ea typeface="Open Sans" panose="020B0606030504020204" pitchFamily="34" charset="0"/>
+              <a:cs typeface="Open Sans" panose="020B0606030504020204" pitchFamily="34" charset="0"/>
+            </a:endParaRPr>
+          </a:p>
+          <a:p>
+            <a:pPr marL="285750" indent="-285750">
+              <a:buFont typeface="Arial" panose="020B0604020202020204" pitchFamily="34" charset="0"/>
+              <a:buChar char="•"/>
+            </a:pPr>
+            <a:r>
+              <a:rPr lang="en-SG" dirty="0">
+                <a:latin typeface="Open Sans" panose="020B0606030504020204" pitchFamily="34" charset="0"/>
+                <a:ea typeface="Open Sans" panose="020B0606030504020204" pitchFamily="34" charset="0"/>
+                <a:cs typeface="Open Sans" panose="020B0606030504020204" pitchFamily="34" charset="0"/>
+              </a:rPr>
+              <a:t>Multi-hot encoding relies on expected set of values from gold_config.yaml to apply encoding to all splits (train / validation / test / OOT)</a:t>
+            </a:r>
+          </a:p>
+          <a:p>
+            <a:endParaRPr lang="en-SG" dirty="0">
+              <a:latin typeface="Open Sans" panose="020B0606030504020204" pitchFamily="34" charset="0"/>
+              <a:ea typeface="Open Sans" panose="020B0606030504020204" pitchFamily="34" charset="0"/>
+              <a:cs typeface="Open Sans" panose="020B0606030504020204" pitchFamily="34" charset="0"/>
+            </a:endParaRPr>
+          </a:p>
+          <a:p>
+            <a:r>
+              <a:rPr lang="en-SG" dirty="0">
+                <a:latin typeface="Open Sans" panose="020B0606030504020204" pitchFamily="34" charset="0"/>
+                <a:ea typeface="Open Sans" panose="020B0606030504020204" pitchFamily="34" charset="0"/>
+                <a:cs typeface="Open Sans" panose="020B0606030504020204" pitchFamily="34" charset="0"/>
+              </a:rPr>
+              <a:t>Encoding pipeline for other categorical variables </a:t>
+            </a:r>
+            <a:r>
+              <a:rPr lang="en-SG" b="1" dirty="0">
+                <a:latin typeface="Open Sans" panose="020B0606030504020204" pitchFamily="34" charset="0"/>
+                <a:ea typeface="Open Sans" panose="020B0606030504020204" pitchFamily="34" charset="0"/>
+                <a:cs typeface="Open Sans" panose="020B0606030504020204" pitchFamily="34" charset="0"/>
+              </a:rPr>
+              <a:t>fits only on train dataset </a:t>
+            </a:r>
+            <a:r>
+              <a:rPr lang="en-SG" dirty="0">
+                <a:latin typeface="Open Sans" panose="020B0606030504020204" pitchFamily="34" charset="0"/>
+                <a:ea typeface="Open Sans" panose="020B0606030504020204" pitchFamily="34" charset="0"/>
+                <a:cs typeface="Open Sans" panose="020B0606030504020204" pitchFamily="34" charset="0"/>
+              </a:rPr>
+              <a:t>and </a:t>
+            </a:r>
+            <a:r>
+              <a:rPr lang="en-SG" b="1" dirty="0">
+                <a:latin typeface="Open Sans" panose="020B0606030504020204" pitchFamily="34" charset="0"/>
+                <a:ea typeface="Open Sans" panose="020B0606030504020204" pitchFamily="34" charset="0"/>
+                <a:cs typeface="Open Sans" panose="020B0606030504020204" pitchFamily="34" charset="0"/>
+              </a:rPr>
+              <a:t>transforms other splits </a:t>
+            </a:r>
+            <a:r>
+              <a:rPr lang="en-SG" dirty="0">
+                <a:latin typeface="Open Sans" panose="020B0606030504020204" pitchFamily="34" charset="0"/>
+                <a:ea typeface="Open Sans" panose="020B0606030504020204" pitchFamily="34" charset="0"/>
+                <a:cs typeface="Open Sans" panose="020B0606030504020204" pitchFamily="34" charset="0"/>
+              </a:rPr>
+              <a:t>(test / validation / OOT) using the train fitted pipeline</a:t>
+            </a:r>
+          </a:p>
+          <a:p>
+            <a:pPr marL="285750" indent="-285750">
+              <a:buFont typeface="Wingdings" panose="05000000000000000000" pitchFamily="2" charset="2"/>
+              <a:buChar char="Ø"/>
+            </a:pPr>
+            <a:r>
+              <a:rPr lang="en-SG" b="1" dirty="0">
+                <a:latin typeface="Open Sans" panose="020B0606030504020204" pitchFamily="34" charset="0"/>
+                <a:ea typeface="Open Sans" panose="020B0606030504020204" pitchFamily="34" charset="0"/>
+                <a:cs typeface="Open Sans" panose="020B0606030504020204" pitchFamily="34" charset="0"/>
+              </a:rPr>
+              <a:t>Guarantees no data leakage </a:t>
+            </a:r>
+            <a:r>
+              <a:rPr lang="en-SG" dirty="0">
+                <a:latin typeface="Open Sans" panose="020B0606030504020204" pitchFamily="34" charset="0"/>
+                <a:ea typeface="Open Sans" panose="020B0606030504020204" pitchFamily="34" charset="0"/>
+                <a:cs typeface="Open Sans" panose="020B0606030504020204" pitchFamily="34" charset="0"/>
+              </a:rPr>
+              <a:t>from unseen datasets into training</a:t>
+            </a:r>
+          </a:p>
+          <a:p>
+            <a:pPr marL="285750" indent="-285750">
+              <a:buFont typeface="Wingdings" panose="05000000000000000000" pitchFamily="2" charset="2"/>
+              <a:buChar char="Ø"/>
+            </a:pPr>
+            <a:r>
+              <a:rPr lang="en-SG" dirty="0">
+                <a:latin typeface="Open Sans" panose="020B0606030504020204" pitchFamily="34" charset="0"/>
+                <a:ea typeface="Open Sans" panose="020B0606030504020204" pitchFamily="34" charset="0"/>
+                <a:cs typeface="Open Sans" panose="020B0606030504020204" pitchFamily="34" charset="0"/>
+              </a:rPr>
+              <a:t>All splits result in the same number of columns</a:t>
+            </a:r>
+          </a:p>
+        </p:txBody>
+      </p:sp>
+      <p:pic>
+        <p:nvPicPr>
+          <p:cNvPr id="7" name="Picture 6">
+            <a:extLst>
+              <a:ext uri="{FF2B5EF4-FFF2-40B4-BE49-F238E27FC236}">
+                <a16:creationId xmlns:a16="http://schemas.microsoft.com/office/drawing/2014/main" id="{EF105581-A276-2E3B-ED0E-A683F48D3361}"/>
+              </a:ext>
+            </a:extLst>
+          </p:cNvPr>
+          <p:cNvPicPr>
+            <a:picLocks noChangeAspect="1"/>
+          </p:cNvPicPr>
+          <p:nvPr/>
+        </p:nvPicPr>
+        <p:blipFill>
+          <a:blip r:embed="rId2"/>
+          <a:stretch>
+            <a:fillRect/>
+          </a:stretch>
+        </p:blipFill>
+        <p:spPr>
+          <a:xfrm>
+            <a:off x="9923051" y="2376667"/>
+            <a:ext cx="2051112" cy="2416986"/>
+          </a:xfrm>
+          <a:prstGeom prst="rect">
+            <a:avLst/>
+          </a:prstGeom>
+        </p:spPr>
+      </p:pic>
+      <p:sp>
+        <p:nvSpPr>
+          <p:cNvPr id="10" name="Google Shape;2961;p63">
+            <a:extLst>
+              <a:ext uri="{FF2B5EF4-FFF2-40B4-BE49-F238E27FC236}">
+                <a16:creationId xmlns:a16="http://schemas.microsoft.com/office/drawing/2014/main" id="{AC36AD7B-D575-B163-90F0-7F2C75DE3461}"/>
+              </a:ext>
+            </a:extLst>
+          </p:cNvPr>
+          <p:cNvSpPr txBox="1">
+            <a:spLocks/>
+          </p:cNvSpPr>
+          <p:nvPr/>
+        </p:nvSpPr>
+        <p:spPr>
+          <a:xfrm>
+            <a:off x="1704740" y="307865"/>
+            <a:ext cx="7704000" cy="572700"/>
+          </a:xfrm>
+          <a:prstGeom prst="rect">
+            <a:avLst/>
+          </a:prstGeom>
+        </p:spPr>
+        <p:txBody>
+          <a:bodyPr spcFirstLastPara="1" vert="horz" wrap="square" lIns="91425" tIns="91425" rIns="91425" bIns="91425" rtlCol="0" anchor="t" anchorCtr="0">
+            <a:noAutofit/>
+          </a:bodyPr>
+          <a:lstStyle>
+            <a:lvl1pPr algn="l" defTabSz="914400" rtl="0" eaLnBrk="1" latinLnBrk="0" hangingPunct="1">
+              <a:lnSpc>
+                <a:spcPct val="90000"/>
+              </a:lnSpc>
+              <a:spcBef>
+                <a:spcPct val="0"/>
+              </a:spcBef>
+              <a:buNone/>
+              <a:defRPr sz="4400" kern="1200">
+                <a:solidFill>
+                  <a:schemeClr val="tx1"/>
+                </a:solidFill>
+                <a:latin typeface="+mj-lt"/>
+                <a:ea typeface="+mj-ea"/>
+                <a:cs typeface="+mj-cs"/>
+              </a:defRPr>
+            </a:lvl1pPr>
+          </a:lstStyle>
+          <a:p>
+            <a:r>
+              <a:rPr lang="en-US" sz="2800" dirty="0"/>
+              <a:t>Gold Tables Processing – Pipelining Considerations</a:t>
+            </a:r>
+            <a:endParaRPr lang="en-US" dirty="0"/>
+          </a:p>
+        </p:txBody>
+      </p:sp>
+      <p:grpSp>
+        <p:nvGrpSpPr>
+          <p:cNvPr id="11" name="Google Shape;11537;p106">
+            <a:extLst>
+              <a:ext uri="{FF2B5EF4-FFF2-40B4-BE49-F238E27FC236}">
+                <a16:creationId xmlns:a16="http://schemas.microsoft.com/office/drawing/2014/main" id="{76BEE528-42AD-FA29-F144-38974E97853C}"/>
+              </a:ext>
+            </a:extLst>
+          </p:cNvPr>
+          <p:cNvGrpSpPr/>
+          <p:nvPr/>
+        </p:nvGrpSpPr>
+        <p:grpSpPr>
+          <a:xfrm>
+            <a:off x="836010" y="172356"/>
+            <a:ext cx="712849" cy="762149"/>
+            <a:chOff x="-3771675" y="3971775"/>
+            <a:chExt cx="291300" cy="292025"/>
+          </a:xfrm>
+          <a:solidFill>
+            <a:srgbClr val="FFD700"/>
+          </a:solidFill>
+        </p:grpSpPr>
+        <p:sp>
+          <p:nvSpPr>
+            <p:cNvPr id="12" name="Google Shape;11538;p106">
+              <a:extLst>
+                <a:ext uri="{FF2B5EF4-FFF2-40B4-BE49-F238E27FC236}">
+                  <a16:creationId xmlns:a16="http://schemas.microsoft.com/office/drawing/2014/main" id="{D5DC94E8-BE3E-4921-371D-03D6496A6D63}"/>
+                </a:ext>
+              </a:extLst>
+            </p:cNvPr>
+            <p:cNvSpPr/>
+            <p:nvPr/>
+          </p:nvSpPr>
+          <p:spPr>
+            <a:xfrm>
+              <a:off x="-3770100" y="3971775"/>
+              <a:ext cx="218975" cy="66775"/>
+            </a:xfrm>
+            <a:custGeom>
+              <a:avLst/>
+              <a:gdLst/>
+              <a:ahLst/>
+              <a:cxnLst/>
+              <a:rect l="l" t="t" r="r" b="b"/>
+              <a:pathLst>
+                <a:path w="8759" h="2671" extrusionOk="0">
+                  <a:moveTo>
+                    <a:pt x="4391" y="0"/>
+                  </a:moveTo>
+                  <a:cubicBezTo>
+                    <a:pt x="2410" y="0"/>
+                    <a:pt x="426" y="449"/>
+                    <a:pt x="0" y="1347"/>
+                  </a:cubicBezTo>
+                  <a:cubicBezTo>
+                    <a:pt x="426" y="2229"/>
+                    <a:pt x="2410" y="2670"/>
+                    <a:pt x="4391" y="2670"/>
+                  </a:cubicBezTo>
+                  <a:cubicBezTo>
+                    <a:pt x="6372" y="2670"/>
+                    <a:pt x="8349" y="2229"/>
+                    <a:pt x="8759" y="1347"/>
+                  </a:cubicBezTo>
+                  <a:cubicBezTo>
+                    <a:pt x="8349" y="449"/>
+                    <a:pt x="6372" y="0"/>
+                    <a:pt x="4391" y="0"/>
+                  </a:cubicBezTo>
+                  <a:close/>
+                </a:path>
+              </a:pathLst>
+            </a:custGeom>
+            <a:grpFill/>
+            <a:ln>
+              <a:noFill/>
+            </a:ln>
+          </p:spPr>
+          <p:txBody>
+            <a:bodyPr spcFirstLastPara="1" wrap="square" lIns="91425" tIns="91425" rIns="91425" bIns="91425" anchor="ctr" anchorCtr="0">
+              <a:noAutofit/>
+            </a:bodyPr>
+            <a:lstStyle/>
+            <a:p>
+              <a:pPr marL="0" lvl="0" indent="0" algn="l" rtl="0">
+                <a:spcBef>
+                  <a:spcPts val="0"/>
+                </a:spcBef>
+                <a:spcAft>
+                  <a:spcPts val="0"/>
+                </a:spcAft>
+                <a:buNone/>
+              </a:pPr>
+              <a:endParaRPr/>
+            </a:p>
+          </p:txBody>
+        </p:sp>
+        <p:sp>
+          <p:nvSpPr>
+            <p:cNvPr id="13" name="Google Shape;11539;p106">
+              <a:extLst>
+                <a:ext uri="{FF2B5EF4-FFF2-40B4-BE49-F238E27FC236}">
+                  <a16:creationId xmlns:a16="http://schemas.microsoft.com/office/drawing/2014/main" id="{5EAA81F8-2F1A-945F-D20E-45D5682F7386}"/>
+                </a:ext>
+              </a:extLst>
+            </p:cNvPr>
+            <p:cNvSpPr/>
+            <p:nvPr/>
+          </p:nvSpPr>
+          <p:spPr>
+            <a:xfrm>
+              <a:off x="-3771675" y="4030650"/>
+              <a:ext cx="222125" cy="78000"/>
+            </a:xfrm>
+            <a:custGeom>
+              <a:avLst/>
+              <a:gdLst/>
+              <a:ahLst/>
+              <a:cxnLst/>
+              <a:rect l="l" t="t" r="r" b="b"/>
+              <a:pathLst>
+                <a:path w="8885" h="3120" extrusionOk="0">
+                  <a:moveTo>
+                    <a:pt x="0" y="0"/>
+                  </a:moveTo>
+                  <a:lnTo>
+                    <a:pt x="0" y="1418"/>
+                  </a:lnTo>
+                  <a:cubicBezTo>
+                    <a:pt x="0" y="2521"/>
+                    <a:pt x="2048" y="3088"/>
+                    <a:pt x="4127" y="3119"/>
+                  </a:cubicBezTo>
+                  <a:cubicBezTo>
+                    <a:pt x="4915" y="1891"/>
+                    <a:pt x="6301" y="1103"/>
+                    <a:pt x="7877" y="1103"/>
+                  </a:cubicBezTo>
+                  <a:cubicBezTo>
+                    <a:pt x="8223" y="1103"/>
+                    <a:pt x="8570" y="1135"/>
+                    <a:pt x="8885" y="1229"/>
+                  </a:cubicBezTo>
+                  <a:lnTo>
+                    <a:pt x="8885" y="0"/>
+                  </a:lnTo>
+                  <a:cubicBezTo>
+                    <a:pt x="7908" y="788"/>
+                    <a:pt x="6112" y="1072"/>
+                    <a:pt x="4443" y="1072"/>
+                  </a:cubicBezTo>
+                  <a:cubicBezTo>
+                    <a:pt x="2804" y="1072"/>
+                    <a:pt x="977" y="757"/>
+                    <a:pt x="0" y="0"/>
+                  </a:cubicBezTo>
+                  <a:close/>
+                </a:path>
+              </a:pathLst>
+            </a:custGeom>
+            <a:grpFill/>
+            <a:ln>
+              <a:noFill/>
+            </a:ln>
+          </p:spPr>
+          <p:txBody>
+            <a:bodyPr spcFirstLastPara="1" wrap="square" lIns="91425" tIns="91425" rIns="91425" bIns="91425" anchor="ctr" anchorCtr="0">
+              <a:noAutofit/>
+            </a:bodyPr>
+            <a:lstStyle/>
+            <a:p>
+              <a:pPr marL="0" lvl="0" indent="0" algn="l" rtl="0">
+                <a:spcBef>
+                  <a:spcPts val="0"/>
+                </a:spcBef>
+                <a:spcAft>
+                  <a:spcPts val="0"/>
+                </a:spcAft>
+                <a:buNone/>
+              </a:pPr>
+              <a:endParaRPr/>
+            </a:p>
+          </p:txBody>
+        </p:sp>
+        <p:sp>
+          <p:nvSpPr>
+            <p:cNvPr id="14" name="Google Shape;11540;p106">
+              <a:extLst>
+                <a:ext uri="{FF2B5EF4-FFF2-40B4-BE49-F238E27FC236}">
+                  <a16:creationId xmlns:a16="http://schemas.microsoft.com/office/drawing/2014/main" id="{80F25E0A-FFAD-6DEE-CBA5-EFFCD7FF4C41}"/>
+                </a:ext>
+              </a:extLst>
+            </p:cNvPr>
+            <p:cNvSpPr/>
+            <p:nvPr/>
+          </p:nvSpPr>
+          <p:spPr>
+            <a:xfrm>
+              <a:off x="-3669425" y="4074750"/>
+              <a:ext cx="189050" cy="189050"/>
+            </a:xfrm>
+            <a:custGeom>
+              <a:avLst/>
+              <a:gdLst/>
+              <a:ahLst/>
+              <a:cxnLst/>
+              <a:rect l="l" t="t" r="r" b="b"/>
+              <a:pathLst>
+                <a:path w="7562" h="7562" extrusionOk="0">
+                  <a:moveTo>
+                    <a:pt x="5501" y="2732"/>
+                  </a:moveTo>
+                  <a:cubicBezTo>
+                    <a:pt x="5748" y="2732"/>
+                    <a:pt x="6008" y="3067"/>
+                    <a:pt x="5766" y="3309"/>
+                  </a:cubicBezTo>
+                  <a:lnTo>
+                    <a:pt x="3718" y="5356"/>
+                  </a:lnTo>
+                  <a:cubicBezTo>
+                    <a:pt x="3655" y="5420"/>
+                    <a:pt x="3568" y="5451"/>
+                    <a:pt x="3482" y="5451"/>
+                  </a:cubicBezTo>
+                  <a:cubicBezTo>
+                    <a:pt x="3395" y="5451"/>
+                    <a:pt x="3308" y="5420"/>
+                    <a:pt x="3245" y="5356"/>
+                  </a:cubicBezTo>
+                  <a:lnTo>
+                    <a:pt x="1859" y="4002"/>
+                  </a:lnTo>
+                  <a:cubicBezTo>
+                    <a:pt x="1617" y="3760"/>
+                    <a:pt x="1840" y="3425"/>
+                    <a:pt x="2099" y="3425"/>
+                  </a:cubicBezTo>
+                  <a:cubicBezTo>
+                    <a:pt x="2177" y="3425"/>
+                    <a:pt x="2259" y="3456"/>
+                    <a:pt x="2332" y="3529"/>
+                  </a:cubicBezTo>
+                  <a:lnTo>
+                    <a:pt x="3466" y="4663"/>
+                  </a:lnTo>
+                  <a:lnTo>
+                    <a:pt x="5293" y="2836"/>
+                  </a:lnTo>
+                  <a:cubicBezTo>
+                    <a:pt x="5352" y="2763"/>
+                    <a:pt x="5426" y="2732"/>
+                    <a:pt x="5501" y="2732"/>
+                  </a:cubicBezTo>
+                  <a:close/>
+                  <a:moveTo>
+                    <a:pt x="3781" y="1"/>
+                  </a:moveTo>
+                  <a:cubicBezTo>
+                    <a:pt x="1702" y="1"/>
+                    <a:pt x="0" y="1702"/>
+                    <a:pt x="0" y="3781"/>
+                  </a:cubicBezTo>
+                  <a:cubicBezTo>
+                    <a:pt x="0" y="5892"/>
+                    <a:pt x="1702" y="7562"/>
+                    <a:pt x="3781" y="7562"/>
+                  </a:cubicBezTo>
+                  <a:cubicBezTo>
+                    <a:pt x="5860" y="7562"/>
+                    <a:pt x="7562" y="5892"/>
+                    <a:pt x="7562" y="3781"/>
+                  </a:cubicBezTo>
+                  <a:cubicBezTo>
+                    <a:pt x="7562" y="1702"/>
+                    <a:pt x="5860" y="1"/>
+                    <a:pt x="3781" y="1"/>
+                  </a:cubicBezTo>
+                  <a:close/>
+                </a:path>
+              </a:pathLst>
+            </a:custGeom>
+            <a:grpFill/>
+            <a:ln>
+              <a:noFill/>
+            </a:ln>
+          </p:spPr>
+          <p:txBody>
+            <a:bodyPr spcFirstLastPara="1" wrap="square" lIns="91425" tIns="91425" rIns="91425" bIns="91425" anchor="ctr" anchorCtr="0">
+              <a:noAutofit/>
+            </a:bodyPr>
+            <a:lstStyle/>
+            <a:p>
+              <a:pPr marL="0" lvl="0" indent="0" algn="l" rtl="0">
+                <a:spcBef>
+                  <a:spcPts val="0"/>
+                </a:spcBef>
+                <a:spcAft>
+                  <a:spcPts val="0"/>
+                </a:spcAft>
+                <a:buNone/>
+              </a:pPr>
+              <a:endParaRPr/>
+            </a:p>
+          </p:txBody>
+        </p:sp>
+        <p:sp>
+          <p:nvSpPr>
+            <p:cNvPr id="15" name="Google Shape;11541;p106">
+              <a:extLst>
+                <a:ext uri="{FF2B5EF4-FFF2-40B4-BE49-F238E27FC236}">
+                  <a16:creationId xmlns:a16="http://schemas.microsoft.com/office/drawing/2014/main" id="{E227A422-735E-F21A-F502-61F876DCF04B}"/>
+                </a:ext>
+              </a:extLst>
+            </p:cNvPr>
+            <p:cNvSpPr/>
+            <p:nvPr/>
+          </p:nvSpPr>
+          <p:spPr>
+            <a:xfrm>
+              <a:off x="-3771675" y="4099950"/>
+              <a:ext cx="94525" cy="76425"/>
+            </a:xfrm>
+            <a:custGeom>
+              <a:avLst/>
+              <a:gdLst/>
+              <a:ahLst/>
+              <a:cxnLst/>
+              <a:rect l="l" t="t" r="r" b="b"/>
+              <a:pathLst>
+                <a:path w="3781" h="3057" extrusionOk="0">
+                  <a:moveTo>
+                    <a:pt x="0" y="1"/>
+                  </a:moveTo>
+                  <a:lnTo>
+                    <a:pt x="0" y="1419"/>
+                  </a:lnTo>
+                  <a:cubicBezTo>
+                    <a:pt x="0" y="2364"/>
+                    <a:pt x="1607" y="2899"/>
+                    <a:pt x="3434" y="3057"/>
+                  </a:cubicBezTo>
+                  <a:cubicBezTo>
+                    <a:pt x="3371" y="2364"/>
+                    <a:pt x="3497" y="1671"/>
+                    <a:pt x="3781" y="1040"/>
+                  </a:cubicBezTo>
+                  <a:cubicBezTo>
+                    <a:pt x="2332" y="977"/>
+                    <a:pt x="819" y="662"/>
+                    <a:pt x="0" y="1"/>
+                  </a:cubicBezTo>
+                  <a:close/>
+                </a:path>
+              </a:pathLst>
+            </a:custGeom>
+            <a:grpFill/>
+            <a:ln>
+              <a:noFill/>
+            </a:ln>
+          </p:spPr>
+          <p:txBody>
+            <a:bodyPr spcFirstLastPara="1" wrap="square" lIns="91425" tIns="91425" rIns="91425" bIns="91425" anchor="ctr" anchorCtr="0">
+              <a:noAutofit/>
+            </a:bodyPr>
+            <a:lstStyle/>
+            <a:p>
+              <a:pPr marL="0" lvl="0" indent="0" algn="l" rtl="0">
+                <a:spcBef>
+                  <a:spcPts val="0"/>
+                </a:spcBef>
+                <a:spcAft>
+                  <a:spcPts val="0"/>
+                </a:spcAft>
+                <a:buNone/>
+              </a:pPr>
+              <a:endParaRPr/>
+            </a:p>
+          </p:txBody>
+        </p:sp>
+        <p:sp>
+          <p:nvSpPr>
+            <p:cNvPr id="16" name="Google Shape;11542;p106">
+              <a:extLst>
+                <a:ext uri="{FF2B5EF4-FFF2-40B4-BE49-F238E27FC236}">
+                  <a16:creationId xmlns:a16="http://schemas.microsoft.com/office/drawing/2014/main" id="{3CA29FD0-E3F6-E0C9-3C55-D3AE1B1748E1}"/>
+                </a:ext>
+              </a:extLst>
+            </p:cNvPr>
+            <p:cNvSpPr/>
+            <p:nvPr/>
+          </p:nvSpPr>
+          <p:spPr>
+            <a:xfrm>
+              <a:off x="-3771675" y="4167700"/>
+              <a:ext cx="135500" cy="95325"/>
+            </a:xfrm>
+            <a:custGeom>
+              <a:avLst/>
+              <a:gdLst/>
+              <a:ahLst/>
+              <a:cxnLst/>
+              <a:rect l="l" t="t" r="r" b="b"/>
+              <a:pathLst>
+                <a:path w="5420" h="3813" extrusionOk="0">
+                  <a:moveTo>
+                    <a:pt x="0" y="0"/>
+                  </a:moveTo>
+                  <a:lnTo>
+                    <a:pt x="0" y="2111"/>
+                  </a:lnTo>
+                  <a:cubicBezTo>
+                    <a:pt x="0" y="3277"/>
+                    <a:pt x="2237" y="3812"/>
+                    <a:pt x="4443" y="3812"/>
+                  </a:cubicBezTo>
+                  <a:cubicBezTo>
+                    <a:pt x="4789" y="3812"/>
+                    <a:pt x="5104" y="3812"/>
+                    <a:pt x="5419" y="3781"/>
+                  </a:cubicBezTo>
+                  <a:cubicBezTo>
+                    <a:pt x="4474" y="3151"/>
+                    <a:pt x="3781" y="2206"/>
+                    <a:pt x="3529" y="1071"/>
+                  </a:cubicBezTo>
+                  <a:cubicBezTo>
+                    <a:pt x="2174" y="977"/>
+                    <a:pt x="788" y="662"/>
+                    <a:pt x="0" y="0"/>
+                  </a:cubicBezTo>
+                  <a:close/>
+                </a:path>
+              </a:pathLst>
+            </a:custGeom>
+            <a:grpFill/>
+            <a:ln>
+              <a:noFill/>
+            </a:ln>
+          </p:spPr>
+          <p:txBody>
+            <a:bodyPr spcFirstLastPara="1" wrap="square" lIns="91425" tIns="91425" rIns="91425" bIns="91425" anchor="ctr" anchorCtr="0">
+              <a:noAutofit/>
+            </a:bodyPr>
+            <a:lstStyle/>
+            <a:p>
+              <a:pPr marL="0" lvl="0" indent="0" algn="l" rtl="0">
+                <a:spcBef>
+                  <a:spcPts val="0"/>
+                </a:spcBef>
+                <a:spcAft>
+                  <a:spcPts val="0"/>
+                </a:spcAft>
+                <a:buNone/>
+              </a:pPr>
+              <a:endParaRPr/>
+            </a:p>
+          </p:txBody>
+        </p:sp>
+      </p:grpSp>
+    </p:spTree>
+    <p:extLst>
+      <p:ext uri="{BB962C8B-B14F-4D97-AF65-F5344CB8AC3E}">
+        <p14:creationId xmlns:p14="http://schemas.microsoft.com/office/powerpoint/2010/main" val="417030275"/>
       </p:ext>
     </p:extLst>
   </p:cSld>
